--- a/King_County_House_Price_Prediction.pptx
+++ b/King_County_House_Price_Prediction.pptx
@@ -4,6 +4,9 @@
   <p:sldMasterIdLst>
     <p:sldMasterId id="2147483648" r:id="rId1"/>
   </p:sldMasterIdLst>
+  <p:notesMasterIdLst>
+    <p:notesMasterId r:id="rId14"/>
+  </p:notesMasterIdLst>
   <p:sldIdLst>
     <p:sldId id="256" r:id="rId2"/>
     <p:sldId id="257" r:id="rId3"/>
@@ -18,9 +21,6 @@
     <p:sldId id="266" r:id="rId12"/>
     <p:sldId id="267" r:id="rId13"/>
   </p:sldIdLst>
-  <p:notesMasterIdLst>
-    <p:notesMasterId r:id="rId14"/>
-  </p:notesMasterIdLst>
   <p:sldSz cx="12192000" cy="6858000"/>
   <p:notesSz cx="6858000" cy="12192000"/>
   <p:defaultTextStyle>
@@ -115,6 +115,11 @@
       </a:defRPr>
     </a:lvl9pPr>
   </p:defaultTextStyle>
+  <p:extLst>
+    <p:ext uri="{EFAFB233-063F-42B5-8137-9DF3F51BA10A}">
+      <p15:sldGuideLst xmlns:p15="http://schemas.microsoft.com/office/powerpoint/2012/main"/>
+    </p:ext>
+  </p:extLst>
 </p:presentation>
 </file>
 
@@ -140,234 +145,10 @@
           <a:chExt cx="0" cy="0"/>
         </a:xfrm>
       </p:grpSpPr>
-      <p:sp>
-        <p:nvSpPr>
-          <p:cNvPr id="2" name="Header Placeholder 1"/>
-          <p:cNvSpPr>
-            <a:spLocks noGrp="1"/>
-          </p:cNvSpPr>
-          <p:nvPr>
-            <p:ph type="hdr" sz="quarter"/>
-          </p:nvPr>
-        </p:nvSpPr>
-        <p:spPr>
-          <a:xfrm>
-            <a:off x="0" y="0"/>
-            <a:ext cx="2971800" cy="458788"/>
-          </a:xfrm>
-          <a:prstGeom prst="rect">
-            <a:avLst/>
-          </a:prstGeom>
-        </p:spPr>
-        <p:txBody>
-          <a:bodyPr vert="horz" lIns="91440" tIns="45720" rIns="91440" bIns="45720" rtlCol="0"/>
-          <a:lstStyle>
-            <a:lvl1pPr algn="l">
-              <a:defRPr sz="1200"/>
-            </a:lvl1pPr>
-          </a:lstStyle>
-          <a:p>
-            <a:endParaRPr lang="en-US"/>
-          </a:p>
-        </p:txBody>
-      </p:sp>
-      <p:sp>
-        <p:nvSpPr>
-          <p:cNvPr id="3" name="Date Placeholder 2"/>
-          <p:cNvSpPr>
-            <a:spLocks noGrp="1"/>
-          </p:cNvSpPr>
-          <p:nvPr>
-            <p:ph type="dt" idx="1"/>
-          </p:nvPr>
-        </p:nvSpPr>
-        <p:spPr>
-          <a:xfrm>
-            <a:off x="3884613" y="0"/>
-            <a:ext cx="2971800" cy="458788"/>
-          </a:xfrm>
-          <a:prstGeom prst="rect">
-            <a:avLst/>
-          </a:prstGeom>
-        </p:spPr>
-        <p:txBody>
-          <a:bodyPr vert="horz" lIns="91440" tIns="45720" rIns="91440" bIns="45720" rtlCol="0"/>
-          <a:lstStyle>
-            <a:lvl1pPr algn="r">
-              <a:defRPr sz="1200"/>
-            </a:lvl1pPr>
-          </a:lstStyle>
-          <a:p>
-            <a:fld id="{5282F153-3F37-0F45-9E97-73ACFA13230C}" type="datetimeFigureOut">
-              <a:rPr lang="en-US"/>
-              <a:t>7/23/19</a:t>
-            </a:fld>
-            <a:endParaRPr lang="en-US"/>
-          </a:p>
-        </p:txBody>
-      </p:sp>
-      <p:sp>
-        <p:nvSpPr>
-          <p:cNvPr id="4" name="Slide Image Placeholder 3"/>
-          <p:cNvSpPr>
-            <a:spLocks noGrp="1" noRot="1" noChangeAspect="1"/>
-          </p:cNvSpPr>
-          <p:nvPr>
-            <p:ph type="sldImg" idx="2"/>
-          </p:nvPr>
-        </p:nvSpPr>
-        <p:spPr>
-          <a:xfrm>
-            <a:off x="685800" y="1143000"/>
-            <a:ext cx="5486400" cy="3086100"/>
-          </a:xfrm>
-          <a:prstGeom prst="rect">
-            <a:avLst/>
-          </a:prstGeom>
-          <a:noFill/>
-          <a:ln w="12700">
-            <a:solidFill>
-              <a:prstClr val="black"/>
-            </a:solidFill>
-          </a:ln>
-        </p:spPr>
-        <p:txBody>
-          <a:bodyPr vert="horz" lIns="91440" tIns="45720" rIns="91440" bIns="45720" rtlCol="0" anchor="ctr"/>
-          <a:lstStyle/>
-          <a:p>
-            <a:endParaRPr lang="en-US"/>
-          </a:p>
-        </p:txBody>
-      </p:sp>
-      <p:sp>
-        <p:nvSpPr>
-          <p:cNvPr id="5" name="Notes Placeholder 4"/>
-          <p:cNvSpPr>
-            <a:spLocks noGrp="1"/>
-          </p:cNvSpPr>
-          <p:nvPr>
-            <p:ph type="body" sz="quarter" idx="3"/>
-          </p:nvPr>
-        </p:nvSpPr>
-        <p:spPr>
-          <a:xfrm>
-            <a:off x="685800" y="4400550"/>
-            <a:ext cx="5486400" cy="3600450"/>
-          </a:xfrm>
-          <a:prstGeom prst="rect">
-            <a:avLst/>
-          </a:prstGeom>
-        </p:spPr>
-        <p:txBody>
-          <a:bodyPr vert="horz" lIns="91440" tIns="45720" rIns="91440" bIns="45720" rtlCol="0"/>
-          <a:lstStyle/>
-          <a:p>
-            <a:pPr lvl="0"/>
-            <a:r>
-              <a:rPr lang="en-US"/>
-              <a:t>Click to edit Master text styles</a:t>
-            </a:r>
-          </a:p>
-          <a:p>
-            <a:pPr lvl="1"/>
-            <a:r>
-              <a:rPr lang="en-US"/>
-              <a:t>Second level</a:t>
-            </a:r>
-          </a:p>
-          <a:p>
-            <a:pPr lvl="2"/>
-            <a:r>
-              <a:rPr lang="en-US"/>
-              <a:t>Third level</a:t>
-            </a:r>
-          </a:p>
-          <a:p>
-            <a:pPr lvl="3"/>
-            <a:r>
-              <a:rPr lang="en-US"/>
-              <a:t>Fourth level</a:t>
-            </a:r>
-          </a:p>
-          <a:p>
-            <a:pPr lvl="4"/>
-            <a:r>
-              <a:rPr lang="en-US"/>
-              <a:t>Fifth level</a:t>
-            </a:r>
-          </a:p>
-        </p:txBody>
-      </p:sp>
-      <p:sp>
-        <p:nvSpPr>
-          <p:cNvPr id="6" name="Footer Placeholder 5"/>
-          <p:cNvSpPr>
-            <a:spLocks noGrp="1"/>
-          </p:cNvSpPr>
-          <p:nvPr>
-            <p:ph type="ftr" sz="quarter" idx="4"/>
-          </p:nvPr>
-        </p:nvSpPr>
-        <p:spPr>
-          <a:xfrm>
-            <a:off x="0" y="8685213"/>
-            <a:ext cx="2971800" cy="458787"/>
-          </a:xfrm>
-          <a:prstGeom prst="rect">
-            <a:avLst/>
-          </a:prstGeom>
-        </p:spPr>
-        <p:txBody>
-          <a:bodyPr vert="horz" lIns="91440" tIns="45720" rIns="91440" bIns="45720" rtlCol="0" anchor="b"/>
-          <a:lstStyle>
-            <a:lvl1pPr algn="l">
-              <a:defRPr sz="1200"/>
-            </a:lvl1pPr>
-          </a:lstStyle>
-          <a:p>
-            <a:endParaRPr lang="en-US"/>
-          </a:p>
-        </p:txBody>
-      </p:sp>
-      <p:sp>
-        <p:nvSpPr>
-          <p:cNvPr id="7" name="Slide Number Placeholder 6"/>
-          <p:cNvSpPr>
-            <a:spLocks noGrp="1"/>
-          </p:cNvSpPr>
-          <p:nvPr>
-            <p:ph type="sldNum" sz="quarter" idx="5"/>
-          </p:nvPr>
-        </p:nvSpPr>
-        <p:spPr>
-          <a:xfrm>
-            <a:off x="3884613" y="8685213"/>
-            <a:ext cx="2971800" cy="458787"/>
-          </a:xfrm>
-          <a:prstGeom prst="rect">
-            <a:avLst/>
-          </a:prstGeom>
-        </p:spPr>
-        <p:txBody>
-          <a:bodyPr vert="horz" lIns="91440" tIns="45720" rIns="91440" bIns="45720" rtlCol="0" anchor="b"/>
-          <a:lstStyle>
-            <a:lvl1pPr algn="r">
-              <a:defRPr sz="1200"/>
-            </a:lvl1pPr>
-          </a:lstStyle>
-          <a:p>
-            <a:fld id="{CE5E9CC1-C706-0F49-92D6-E571CC5EEA8F}" type="slidenum">
-              <a:rPr lang="en-US"/>
-              <a:t>‹#›</a:t>
-            </a:fld>
-            <a:endParaRPr lang="en-US"/>
-          </a:p>
-        </p:txBody>
-      </p:sp>
     </p:spTree>
     <p:extLst>
       <p:ext uri="{BB962C8B-B14F-4D97-AF65-F5344CB8AC3E}">
-        <p14:creationId xmlns:p14="http://schemas.microsoft.com/office/powerpoint/2010/main" val="1024086991"/>
+        <p14:creationId xmlns:p14="http://schemas.microsoft.com/office/powerpoint/2010/main" val="2693847261"/>
       </p:ext>
     </p:extLst>
   </p:cSld>
@@ -515,7 +296,6 @@
               <a:rPr lang="en-US" dirty="0"/>
               <a:t>Intro (~20s): Hi everyone. This is my final project, King County House Price Prediction. The goal is to predict home sale prices and identify luxury homes using machine learning on 21,000+ real property sales near Seattle.</a:t>
             </a:r>
-            <a:endParaRPr lang="en-US" dirty="0"/>
           </a:p>
         </p:txBody>
       </p:sp>
@@ -603,7 +383,6 @@
               <a:rPr lang="en-US" dirty="0"/>
               <a:t>Conclusions 1 (~30s): All three goals were met. Gradient Boosting explains about 88% of price variance and classifies luxury homes with 93% accuracy. Three features dominate: location, grade, and living area. The tree ensembles clearly beat the linear models because they capture non-linear interactions.</a:t>
             </a:r>
-            <a:endParaRPr lang="en-US" dirty="0"/>
           </a:p>
         </p:txBody>
       </p:sp>
@@ -691,7 +470,6 @@
               <a:rPr lang="en-US" dirty="0"/>
               <a:t>Conclusions 2 (~35s): The most surprising insight — clustering on physical and location features alone, with no price, recovered a premium and a standard segment that track price almost perfectly. That confirms those attributes really define value. Practically, this supports automated valuation and segment-based marketing. The open question is why luxury error stays high, and whether external data would help.</a:t>
             </a:r>
-            <a:endParaRPr lang="en-US" dirty="0"/>
           </a:p>
         </p:txBody>
       </p:sp>
@@ -779,7 +557,6 @@
               <a:rPr lang="en-US" dirty="0"/>
               <a:t>Close (~10s): That's the project — predicting prices, flagging luxury homes, and segmenting the market. Thank you, and I'm happy to take any questions. Now I'll switch to the notebook for the demo.</a:t>
             </a:r>
-            <a:endParaRPr lang="en-US" dirty="0"/>
           </a:p>
         </p:txBody>
       </p:sp>
@@ -867,7 +644,6 @@
               <a:rPr lang="en-US" dirty="0"/>
               <a:t>Overview (~30s): One dataset, three tasks. First, regression to predict the exact price. Second, classification to flag luxury homes over $650k. Third, unsupervised clustering to segment the market. Each task answers a different business question.</a:t>
             </a:r>
-            <a:endParaRPr lang="en-US" dirty="0"/>
           </a:p>
         </p:txBody>
       </p:sp>
@@ -955,7 +731,6 @@
               <a:rPr lang="en-US" dirty="0"/>
               <a:t>Dataset (~30s): 21,613 sales, 21 features, no missing values. Average price is $540k but the distribution is heavily right-skewed — a few mansions up to $7.7M pull the mean up. That's why I log-transform the price before modelling. About a quarter of homes are luxury.</a:t>
             </a:r>
-            <a:endParaRPr lang="en-US" dirty="0"/>
           </a:p>
         </p:txBody>
       </p:sp>
@@ -1043,7 +818,6 @@
               <a:rPr lang="en-US" dirty="0"/>
               <a:t>Implementation 1 (~30s): The flow is load, clean, engineer, then a scikit-learn pipeline. I created features like house age, renovation history, basement flag, and parsed the date. A key best practice: I removed every feature derived from price so there's no target leakage — the model only sees legitimate property attributes.</a:t>
             </a:r>
-            <a:endParaRPr lang="en-US" dirty="0"/>
           </a:p>
         </p:txBody>
       </p:sp>
@@ -1131,7 +905,6 @@
               <a:rPr lang="en-US" dirty="0"/>
               <a:t>Implementation 2 (~30s): Every model runs through the same pipeline, wrapped so it learns on log-price but reports dollar errors. I compared 7 regressors and 4 classifiers on the exact same split. The feature importance chart shows the three biggest price drivers are location, build grade, and living area.</a:t>
             </a:r>
-            <a:endParaRPr lang="en-US" dirty="0"/>
           </a:p>
         </p:txBody>
       </p:sp>
@@ -1219,7 +992,6 @@
               <a:rPr lang="en-US" dirty="0"/>
               <a:t>Challenges (~35s): Four main hurdles. Skewed prices — fixed with a log transform. Leakage risk — fixed by dropping price-derived columns. Many zip codes — one-hot encoded inside the pipeline. And keeping model comparison fair — solved with one reusable evaluation function and a fixed random seed.</a:t>
             </a:r>
-            <a:endParaRPr lang="en-US" dirty="0"/>
           </a:p>
         </p:txBody>
       </p:sp>
@@ -1307,7 +1079,6 @@
               <a:rPr lang="en-US" dirty="0"/>
               <a:t>Tools (~25s): A standard, reproducible Python data stack — pandas and NumPy for data, Matplotlib and Seaborn for visuals, scikit-learn for all the modelling, SciPy for the statistical test, all inside Jupyter. I chose it because it's the industry standard for tabular ML and lets me cover all three tasks in one environment.</a:t>
             </a:r>
-            <a:endParaRPr lang="en-US" dirty="0"/>
           </a:p>
         </p:txBody>
       </p:sp>
@@ -1395,7 +1166,6 @@
               <a:rPr lang="en-US" dirty="0"/>
               <a:t>Project management (~25s): I treated the notebook as both code and documentation — one section per stage, fully reproducible with fixed seeds and reusable functions. What worked was keeping everything in one consistent pipeline. If I extended it, I'd modularise the code and add cross-validated hyperparameter tuning.</a:t>
             </a:r>
-            <a:endParaRPr lang="en-US" dirty="0"/>
           </a:p>
         </p:txBody>
       </p:sp>
@@ -1483,7 +1253,6 @@
               <a:rPr lang="en-US" dirty="0"/>
               <a:t>Major obstacle (~40s): My biggest lesson. The headline R² of 0.88 looked excellent, but when I broke errors down by price band, the model was off by ~$48k on normal homes and ~$158k on luxury homes. Aggregate metrics hid a real weakness on the expensive segment. In hindsight I'd model the luxury tail separately and always report error per segment, not just overall.</a:t>
             </a:r>
-            <a:endParaRPr lang="en-US" dirty="0"/>
           </a:p>
         </p:txBody>
       </p:sp>
@@ -1556,6 +1325,11 @@
 <file path=ppt/slideMasters/slideMaster1.xml><?xml version="1.0" encoding="utf-8"?>
 <p:sldMaster xmlns:a="http://schemas.openxmlformats.org/drawingml/2006/main" xmlns:r="http://schemas.openxmlformats.org/officeDocument/2006/relationships" xmlns:p="http://schemas.openxmlformats.org/presentationml/2006/main">
   <p:cSld>
+    <p:bg>
+      <p:bgRef idx="1001">
+        <a:schemeClr val="bg1"/>
+      </p:bgRef>
+    </p:bg>
     <p:spTree>
       <p:nvGrpSpPr>
         <p:cNvPr id="1" name=""/>
@@ -1838,6 +1612,7 @@
         <a:solidFill>
           <a:srgbClr val="13132B"/>
         </a:solidFill>
+        <a:effectLst/>
       </p:bgPr>
     </p:bg>
     <p:spTree>
@@ -1854,93 +1629,6 @@
           <a:chExt cx="0" cy="0"/>
         </a:xfrm>
       </p:grpSpPr>
-      <p:pic>
-        <p:nvPicPr>
-          <p:cNvPr id="2" name="Image 0" descr="assets/logo_teal.png">    </p:cNvPr>
-          <p:cNvPicPr>
-            <a:picLocks noChangeAspect="1"/>
-          </p:cNvPicPr>
-          <p:nvPr/>
-        </p:nvPicPr>
-        <p:blipFill>
-          <a:blip r:embed="rId1"/>
-          <a:stretch>
-            <a:fillRect/>
-          </a:stretch>
-        </p:blipFill>
-        <p:spPr>
-          <a:xfrm>
-            <a:off x="640080" y="640080"/>
-            <a:ext cx="2194560" cy="585216"/>
-          </a:xfrm>
-          <a:prstGeom prst="rect">
-            <a:avLst/>
-          </a:prstGeom>
-        </p:spPr>
-      </p:pic>
-      <p:pic>
-        <p:nvPicPr>
-          <p:cNvPr id="3" name="Image 1" descr="assets/mark.png">    </p:cNvPr>
-          <p:cNvPicPr>
-            <a:picLocks noChangeAspect="1"/>
-          </p:cNvPicPr>
-          <p:nvPr/>
-        </p:nvPicPr>
-        <p:blipFill>
-          <a:blip r:embed="rId2"/>
-          <a:stretch>
-            <a:fillRect/>
-          </a:stretch>
-        </p:blipFill>
-        <p:spPr>
-          <a:xfrm>
-            <a:off x="9646920" y="685800"/>
-            <a:ext cx="1554480" cy="1554480"/>
-          </a:xfrm>
-          <a:prstGeom prst="rect">
-            <a:avLst/>
-          </a:prstGeom>
-        </p:spPr>
-      </p:pic>
-      <p:sp>
-        <p:nvSpPr>
-          <p:cNvPr id="4" name="Text 0"/>
-          <p:cNvSpPr/>
-          <p:nvPr/>
-        </p:nvSpPr>
-        <p:spPr>
-          <a:xfrm>
-            <a:off x="640080" y="2331720"/>
-            <a:ext cx="10058400" cy="365760"/>
-          </a:xfrm>
-          <a:prstGeom prst="rect">
-            <a:avLst/>
-          </a:prstGeom>
-          <a:noFill/>
-          <a:ln/>
-        </p:spPr>
-        <p:txBody>
-          <a:bodyPr wrap="square" lIns="0" tIns="0" rIns="0" bIns="0" rtlCol="0" anchor="ctr"/>
-          <a:lstStyle/>
-          <a:p>
-            <a:pPr indent="0" marL="0">
-              <a:buNone/>
-            </a:pPr>
-            <a:r>
-              <a:rPr lang="en-US" sz="1400" b="1" spc="300" kern="0" dirty="0">
-                <a:solidFill>
-                  <a:srgbClr val="2EE6D6"/>
-                </a:solidFill>
-                <a:latin typeface="Arial" pitchFamily="34" charset="0"/>
-                <a:ea typeface="Arial" pitchFamily="34" charset="-122"/>
-                <a:cs typeface="Arial" pitchFamily="34" charset="-120"/>
-              </a:rPr>
-              <a:t>DATA ANALYTICS BOOTCAMP · FINAL PROJECT</a:t>
-            </a:r>
-            <a:endParaRPr lang="en-US" sz="1400" dirty="0"/>
-          </a:p>
-        </p:txBody>
-      </p:sp>
       <p:sp>
         <p:nvSpPr>
           <p:cNvPr id="5" name="Text 1"/>
@@ -1962,7 +1650,7 @@
           <a:bodyPr wrap="square" lIns="0" tIns="0" rIns="0" bIns="0" rtlCol="0" anchor="ctr"/>
           <a:lstStyle/>
           <a:p>
-            <a:pPr indent="0" marL="0">
+            <a:pPr marL="0" indent="0">
               <a:lnSpc>
                 <a:spcPct val="98000"/>
               </a:lnSpc>
@@ -1982,7 +1670,7 @@
             <a:endParaRPr lang="en-US" sz="5400" dirty="0"/>
           </a:p>
           <a:p>
-            <a:pPr indent="0" marL="0">
+            <a:pPr marL="0" indent="0">
               <a:lnSpc>
                 <a:spcPct val="98000"/>
               </a:lnSpc>
@@ -2024,7 +1712,7 @@
           <a:bodyPr wrap="square" lIns="0" tIns="0" rIns="0" bIns="0" rtlCol="0" anchor="ctr"/>
           <a:lstStyle/>
           <a:p>
-            <a:pPr indent="0" marL="0">
+            <a:pPr marL="0" indent="0">
               <a:buNone/>
             </a:pPr>
             <a:r>
@@ -2064,6 +1752,13 @@
             <a:prstDash val="solid"/>
           </a:ln>
         </p:spPr>
+        <p:txBody>
+          <a:bodyPr/>
+          <a:lstStyle/>
+          <a:p>
+            <a:endParaRPr lang="es-ES"/>
+          </a:p>
+        </p:txBody>
       </p:sp>
       <p:sp>
         <p:nvSpPr>
@@ -2086,7 +1781,7 @@
           <a:bodyPr wrap="square" lIns="0" tIns="0" rIns="0" bIns="0" rtlCol="0" anchor="ctr"/>
           <a:lstStyle/>
           <a:p>
-            <a:pPr indent="0" marL="0">
+            <a:pPr marL="0" indent="0">
               <a:buNone/>
             </a:pPr>
             <a:r>
@@ -2100,9 +1795,6 @@
               </a:rPr>
               <a:t>Daniel</a:t>
             </a:r>
-            <a:pPr indent="0" marL="0">
-              <a:buNone/>
-            </a:pPr>
             <a:r>
               <a:rPr lang="en-US" sz="1600" dirty="0">
                 <a:solidFill>
@@ -2134,6 +1826,7 @@
         <a:solidFill>
           <a:srgbClr val="FFFFFF"/>
         </a:solidFill>
+        <a:effectLst/>
       </p:bgPr>
     </p:bg>
     <p:spTree>
@@ -2150,30 +1843,6 @@
           <a:chExt cx="0" cy="0"/>
         </a:xfrm>
       </p:grpSpPr>
-      <p:pic>
-        <p:nvPicPr>
-          <p:cNvPr id="2" name="Image 0" descr="assets/logo_navy.png">    </p:cNvPr>
-          <p:cNvPicPr>
-            <a:picLocks noChangeAspect="1"/>
-          </p:cNvPicPr>
-          <p:nvPr/>
-        </p:nvPicPr>
-        <p:blipFill>
-          <a:blip r:embed="rId1"/>
-          <a:stretch>
-            <a:fillRect/>
-          </a:stretch>
-        </p:blipFill>
-        <p:spPr>
-          <a:xfrm>
-            <a:off x="502920" y="310896"/>
-            <a:ext cx="1417320" cy="374904"/>
-          </a:xfrm>
-          <a:prstGeom prst="rect">
-            <a:avLst/>
-          </a:prstGeom>
-        </p:spPr>
-      </p:pic>
       <p:sp>
         <p:nvSpPr>
           <p:cNvPr id="3" name="Text 0"/>
@@ -2195,11 +1864,11 @@
           <a:bodyPr wrap="square" lIns="0" tIns="0" rIns="0" bIns="0" rtlCol="0" anchor="ctr"/>
           <a:lstStyle/>
           <a:p>
-            <a:pPr indent="0" marL="0">
-              <a:buNone/>
-            </a:pPr>
-            <a:r>
-              <a:rPr lang="en-US" sz="1200" b="1" spc="200" kern="0" dirty="0">
+            <a:pPr marL="0" indent="0">
+              <a:buNone/>
+            </a:pPr>
+            <a:r>
+              <a:rPr lang="en-US" sz="1200" b="1" kern="0" spc="200" dirty="0">
                 <a:solidFill>
                   <a:srgbClr val="13B9AB"/>
                 </a:solidFill>
@@ -2234,7 +1903,7 @@
           <a:bodyPr wrap="square" lIns="0" tIns="0" rIns="0" bIns="0" rtlCol="0" anchor="ctr"/>
           <a:lstStyle/>
           <a:p>
-            <a:pPr indent="0" marL="0">
+            <a:pPr marL="0" indent="0">
               <a:buNone/>
             </a:pPr>
             <a:r>
@@ -2273,13 +1942,20 @@
           </a:solidFill>
           <a:ln/>
           <a:effectLst>
-            <a:outerShdw sx="100000" sy="100000" kx="0" ky="0" algn="bl" rotWithShape="0" blurRad="114300" dist="38100" dir="5400000">
+            <a:outerShdw blurRad="114300" dist="38100" dir="5400000" algn="bl" rotWithShape="0">
               <a:srgbClr val="000000">
                 <a:alpha val="16000"/>
               </a:srgbClr>
             </a:outerShdw>
           </a:effectLst>
         </p:spPr>
+        <p:txBody>
+          <a:bodyPr/>
+          <a:lstStyle/>
+          <a:p>
+            <a:endParaRPr lang="es-ES"/>
+          </a:p>
+        </p:txBody>
       </p:sp>
       <p:sp>
         <p:nvSpPr>
@@ -2302,7 +1978,7 @@
           <a:bodyPr wrap="square" lIns="0" tIns="0" rIns="0" bIns="0" rtlCol="0" anchor="ctr"/>
           <a:lstStyle/>
           <a:p>
-            <a:pPr algn="ctr" indent="0" marL="0">
+            <a:pPr marL="0" indent="0" algn="ctr">
               <a:buNone/>
             </a:pPr>
             <a:r>
@@ -2341,7 +2017,7 @@
           <a:bodyPr wrap="square" lIns="0" tIns="0" rIns="0" bIns="0" rtlCol="0" anchor="ctr"/>
           <a:lstStyle/>
           <a:p>
-            <a:pPr algn="ctr" indent="0" marL="0">
+            <a:pPr marL="0" indent="0" algn="ctr">
               <a:lnSpc>
                 <a:spcPct val="100000"/>
               </a:lnSpc>
@@ -2383,13 +2059,20 @@
           </a:solidFill>
           <a:ln/>
           <a:effectLst>
-            <a:outerShdw sx="100000" sy="100000" kx="0" ky="0" algn="bl" rotWithShape="0" blurRad="114300" dist="38100" dir="5400000">
+            <a:outerShdw blurRad="114300" dist="38100" dir="5400000" algn="bl" rotWithShape="0">
               <a:srgbClr val="000000">
                 <a:alpha val="16000"/>
               </a:srgbClr>
             </a:outerShdw>
           </a:effectLst>
         </p:spPr>
+        <p:txBody>
+          <a:bodyPr/>
+          <a:lstStyle/>
+          <a:p>
+            <a:endParaRPr lang="es-ES"/>
+          </a:p>
+        </p:txBody>
       </p:sp>
       <p:sp>
         <p:nvSpPr>
@@ -2412,7 +2095,7 @@
           <a:bodyPr wrap="square" lIns="0" tIns="0" rIns="0" bIns="0" rtlCol="0" anchor="ctr"/>
           <a:lstStyle/>
           <a:p>
-            <a:pPr algn="ctr" indent="0" marL="0">
+            <a:pPr marL="0" indent="0" algn="ctr">
               <a:buNone/>
             </a:pPr>
             <a:r>
@@ -2451,7 +2134,7 @@
           <a:bodyPr wrap="square" lIns="0" tIns="0" rIns="0" bIns="0" rtlCol="0" anchor="ctr"/>
           <a:lstStyle/>
           <a:p>
-            <a:pPr algn="ctr" indent="0" marL="0">
+            <a:pPr marL="0" indent="0" algn="ctr">
               <a:lnSpc>
                 <a:spcPct val="100000"/>
               </a:lnSpc>
@@ -2493,13 +2176,20 @@
           </a:solidFill>
           <a:ln/>
           <a:effectLst>
-            <a:outerShdw sx="100000" sy="100000" kx="0" ky="0" algn="bl" rotWithShape="0" blurRad="114300" dist="38100" dir="5400000">
+            <a:outerShdw blurRad="114300" dist="38100" dir="5400000" algn="bl" rotWithShape="0">
               <a:srgbClr val="000000">
                 <a:alpha val="16000"/>
               </a:srgbClr>
             </a:outerShdw>
           </a:effectLst>
         </p:spPr>
+        <p:txBody>
+          <a:bodyPr/>
+          <a:lstStyle/>
+          <a:p>
+            <a:endParaRPr lang="es-ES"/>
+          </a:p>
+        </p:txBody>
       </p:sp>
       <p:sp>
         <p:nvSpPr>
@@ -2522,7 +2212,7 @@
           <a:bodyPr wrap="square" lIns="0" tIns="0" rIns="0" bIns="0" rtlCol="0" anchor="ctr"/>
           <a:lstStyle/>
           <a:p>
-            <a:pPr algn="ctr" indent="0" marL="0">
+            <a:pPr marL="0" indent="0" algn="ctr">
               <a:buNone/>
             </a:pPr>
             <a:r>
@@ -2561,7 +2251,7 @@
           <a:bodyPr wrap="square" lIns="0" tIns="0" rIns="0" bIns="0" rtlCol="0" anchor="ctr"/>
           <a:lstStyle/>
           <a:p>
-            <a:pPr algn="ctr" indent="0" marL="0">
+            <a:pPr marL="0" indent="0" algn="ctr">
               <a:lnSpc>
                 <a:spcPct val="100000"/>
               </a:lnSpc>
@@ -2603,25 +2293,32 @@
           </a:solidFill>
           <a:ln/>
           <a:effectLst>
-            <a:outerShdw sx="100000" sy="100000" kx="0" ky="0" algn="bl" rotWithShape="0" blurRad="114300" dist="38100" dir="5400000">
+            <a:outerShdw blurRad="114300" dist="38100" dir="5400000" algn="bl" rotWithShape="0">
               <a:srgbClr val="000000">
                 <a:alpha val="16000"/>
               </a:srgbClr>
             </a:outerShdw>
           </a:effectLst>
         </p:spPr>
+        <p:txBody>
+          <a:bodyPr/>
+          <a:lstStyle/>
+          <a:p>
+            <a:endParaRPr lang="es-ES"/>
+          </a:p>
+        </p:txBody>
       </p:sp>
       <p:pic>
         <p:nvPicPr>
-          <p:cNvPr id="15" name="Image 1" descr="assets/fig_reg_r2.png">    </p:cNvPr>
+          <p:cNvPr id="15" name="Image 1" descr="assets/fig_reg_r2.png"/>
           <p:cNvPicPr>
             <a:picLocks noChangeAspect="1"/>
           </p:cNvPicPr>
           <p:nvPr/>
         </p:nvPicPr>
         <p:blipFill>
-          <a:blip r:embed="rId2"/>
-          <a:srcRect l="0" r="0" t="0" b="0"/>
+          <a:blip r:embed="rId3"/>
+          <a:srcRect/>
           <a:stretch/>
         </p:blipFill>
         <p:spPr>
@@ -2655,7 +2352,7 @@
           <a:bodyPr wrap="square" lIns="0" tIns="0" rIns="0" bIns="0" rtlCol="0" anchor="ctr"/>
           <a:lstStyle/>
           <a:p>
-            <a:pPr indent="0" marL="0">
+            <a:pPr marL="0" indent="0">
               <a:buNone/>
             </a:pPr>
             <a:r>
@@ -2694,7 +2391,7 @@
           <a:bodyPr wrap="square" lIns="0" tIns="0" rIns="0" bIns="0" rtlCol="0" anchor="t"/>
           <a:lstStyle/>
           <a:p>
-            <a:pPr indent="0" marL="0">
+            <a:pPr marL="0" indent="0">
               <a:lnSpc>
                 <a:spcPct val="112000"/>
               </a:lnSpc>
@@ -2714,7 +2411,7 @@
             <a:endParaRPr lang="en-US" sz="1400" dirty="0"/>
           </a:p>
           <a:p>
-            <a:pPr indent="0" marL="0">
+            <a:pPr marL="0" indent="0">
               <a:lnSpc>
                 <a:spcPct val="112000"/>
               </a:lnSpc>
@@ -2734,7 +2431,7 @@
             <a:endParaRPr lang="en-US" sz="1400" dirty="0"/>
           </a:p>
           <a:p>
-            <a:pPr indent="0" marL="0">
+            <a:pPr marL="0" indent="0">
               <a:lnSpc>
                 <a:spcPct val="112000"/>
               </a:lnSpc>
@@ -2754,7 +2451,7 @@
             <a:endParaRPr lang="en-US" sz="1400" dirty="0"/>
           </a:p>
           <a:p>
-            <a:pPr indent="0" marL="0">
+            <a:pPr marL="0" indent="0">
               <a:lnSpc>
                 <a:spcPct val="112000"/>
               </a:lnSpc>
@@ -2774,7 +2471,7 @@
             <a:endParaRPr lang="en-US" sz="1400" dirty="0"/>
           </a:p>
           <a:p>
-            <a:pPr indent="0" marL="0">
+            <a:pPr marL="0" indent="0">
               <a:lnSpc>
                 <a:spcPct val="112000"/>
               </a:lnSpc>
@@ -2791,12 +2488,6 @@
               </a:rPr>
               <a:t>✓  Gradient Boosting </a:t>
             </a:r>
-            <a:pPr indent="0" marL="0">
-              <a:lnSpc>
-                <a:spcPct val="112000"/>
-              </a:lnSpc>
-              <a:buNone/>
-            </a:pPr>
             <a:r>
               <a:rPr lang="en-US" sz="1400" dirty="0">
                 <a:solidFill>
@@ -2833,7 +2524,7 @@
           <a:bodyPr wrap="square" rtlCol="0" anchor="ctr"/>
           <a:lstStyle/>
           <a:p>
-            <a:pPr algn="l" indent="0" marL="0">
+            <a:pPr marL="0" indent="0" algn="l">
               <a:buNone/>
             </a:pPr>
             <a:r>
@@ -2872,7 +2563,7 @@
           <a:bodyPr wrap="square" rtlCol="0" anchor="ctr"/>
           <a:lstStyle/>
           <a:p>
-            <a:pPr algn="r" indent="0" marL="0">
+            <a:pPr marL="0" indent="0" algn="r">
               <a:buNone/>
             </a:pPr>
             <a:r>
@@ -2906,6 +2597,7 @@
         <a:solidFill>
           <a:srgbClr val="FFFFFF"/>
         </a:solidFill>
+        <a:effectLst/>
       </p:bgPr>
     </p:bg>
     <p:spTree>
@@ -2922,30 +2614,6 @@
           <a:chExt cx="0" cy="0"/>
         </a:xfrm>
       </p:grpSpPr>
-      <p:pic>
-        <p:nvPicPr>
-          <p:cNvPr id="2" name="Image 0" descr="assets/logo_navy.png">    </p:cNvPr>
-          <p:cNvPicPr>
-            <a:picLocks noChangeAspect="1"/>
-          </p:cNvPicPr>
-          <p:nvPr/>
-        </p:nvPicPr>
-        <p:blipFill>
-          <a:blip r:embed="rId1"/>
-          <a:stretch>
-            <a:fillRect/>
-          </a:stretch>
-        </p:blipFill>
-        <p:spPr>
-          <a:xfrm>
-            <a:off x="502920" y="310896"/>
-            <a:ext cx="1417320" cy="374904"/>
-          </a:xfrm>
-          <a:prstGeom prst="rect">
-            <a:avLst/>
-          </a:prstGeom>
-        </p:spPr>
-      </p:pic>
       <p:sp>
         <p:nvSpPr>
           <p:cNvPr id="3" name="Text 0"/>
@@ -2967,11 +2635,11 @@
           <a:bodyPr wrap="square" lIns="0" tIns="0" rIns="0" bIns="0" rtlCol="0" anchor="ctr"/>
           <a:lstStyle/>
           <a:p>
-            <a:pPr indent="0" marL="0">
-              <a:buNone/>
-            </a:pPr>
-            <a:r>
-              <a:rPr lang="en-US" sz="1200" b="1" spc="200" kern="0" dirty="0">
+            <a:pPr marL="0" indent="0">
+              <a:buNone/>
+            </a:pPr>
+            <a:r>
+              <a:rPr lang="en-US" sz="1200" b="1" kern="0" spc="200" dirty="0">
                 <a:solidFill>
                   <a:srgbClr val="13B9AB"/>
                 </a:solidFill>
@@ -3006,7 +2674,7 @@
           <a:bodyPr wrap="square" lIns="0" tIns="0" rIns="0" bIns="0" rtlCol="0" anchor="ctr"/>
           <a:lstStyle/>
           <a:p>
-            <a:pPr indent="0" marL="0">
+            <a:pPr marL="0" indent="0">
               <a:buNone/>
             </a:pPr>
             <a:r>
@@ -3045,13 +2713,20 @@
           </a:solidFill>
           <a:ln/>
           <a:effectLst>
-            <a:outerShdw sx="100000" sy="100000" kx="0" ky="0" algn="bl" rotWithShape="0" blurRad="114300" dist="38100" dir="5400000">
+            <a:outerShdw blurRad="114300" dist="38100" dir="5400000" algn="bl" rotWithShape="0">
               <a:srgbClr val="000000">
                 <a:alpha val="16000"/>
               </a:srgbClr>
             </a:outerShdw>
           </a:effectLst>
         </p:spPr>
+        <p:txBody>
+          <a:bodyPr/>
+          <a:lstStyle/>
+          <a:p>
+            <a:endParaRPr lang="es-ES"/>
+          </a:p>
+        </p:txBody>
       </p:sp>
       <p:sp>
         <p:nvSpPr>
@@ -3074,7 +2749,7 @@
           <a:bodyPr wrap="square" lIns="0" tIns="0" rIns="0" bIns="0" rtlCol="0" anchor="ctr"/>
           <a:lstStyle/>
           <a:p>
-            <a:pPr indent="0" marL="0">
+            <a:pPr marL="0" indent="0">
               <a:buNone/>
             </a:pPr>
             <a:r>
@@ -3113,7 +2788,7 @@
           <a:bodyPr wrap="square" lIns="0" tIns="0" rIns="0" bIns="0" rtlCol="0" anchor="ctr"/>
           <a:lstStyle/>
           <a:p>
-            <a:pPr indent="0" marL="0">
+            <a:pPr marL="0" indent="0">
               <a:lnSpc>
                 <a:spcPct val="110000"/>
               </a:lnSpc>
@@ -3155,13 +2830,20 @@
           </a:solidFill>
           <a:ln/>
           <a:effectLst>
-            <a:outerShdw sx="100000" sy="100000" kx="0" ky="0" algn="bl" rotWithShape="0" blurRad="114300" dist="38100" dir="5400000">
+            <a:outerShdw blurRad="114300" dist="38100" dir="5400000" algn="bl" rotWithShape="0">
               <a:srgbClr val="000000">
                 <a:alpha val="16000"/>
               </a:srgbClr>
             </a:outerShdw>
           </a:effectLst>
         </p:spPr>
+        <p:txBody>
+          <a:bodyPr/>
+          <a:lstStyle/>
+          <a:p>
+            <a:endParaRPr lang="es-ES"/>
+          </a:p>
+        </p:txBody>
       </p:sp>
       <p:sp>
         <p:nvSpPr>
@@ -3184,7 +2866,7 @@
           <a:bodyPr wrap="square" lIns="0" tIns="0" rIns="0" bIns="0" rtlCol="0" anchor="ctr"/>
           <a:lstStyle/>
           <a:p>
-            <a:pPr algn="ctr" indent="0" marL="0">
+            <a:pPr marL="0" indent="0" algn="ctr">
               <a:buNone/>
             </a:pPr>
             <a:r>
@@ -3223,7 +2905,7 @@
           <a:bodyPr wrap="square" lIns="0" tIns="0" rIns="0" bIns="0" rtlCol="0" anchor="ctr"/>
           <a:lstStyle/>
           <a:p>
-            <a:pPr algn="ctr" indent="0" marL="0">
+            <a:pPr marL="0" indent="0" algn="ctr">
               <a:lnSpc>
                 <a:spcPct val="115000"/>
               </a:lnSpc>
@@ -3243,7 +2925,7 @@
             <a:endParaRPr lang="en-US" sz="1300" dirty="0"/>
           </a:p>
           <a:p>
-            <a:pPr algn="ctr" indent="0" marL="0">
+            <a:pPr marL="0" indent="0" algn="ctr">
               <a:lnSpc>
                 <a:spcPct val="115000"/>
               </a:lnSpc>
@@ -3263,7 +2945,7 @@
             <a:endParaRPr lang="en-US" sz="1300" dirty="0"/>
           </a:p>
           <a:p>
-            <a:pPr algn="ctr" indent="0" marL="0">
+            <a:pPr marL="0" indent="0" algn="ctr">
               <a:lnSpc>
                 <a:spcPct val="115000"/>
               </a:lnSpc>
@@ -3305,13 +2987,20 @@
           </a:solidFill>
           <a:ln/>
           <a:effectLst>
-            <a:outerShdw sx="100000" sy="100000" kx="0" ky="0" algn="bl" rotWithShape="0" blurRad="114300" dist="38100" dir="5400000">
+            <a:outerShdw blurRad="114300" dist="38100" dir="5400000" algn="bl" rotWithShape="0">
               <a:srgbClr val="000000">
                 <a:alpha val="16000"/>
               </a:srgbClr>
             </a:outerShdw>
           </a:effectLst>
         </p:spPr>
+        <p:txBody>
+          <a:bodyPr/>
+          <a:lstStyle/>
+          <a:p>
+            <a:endParaRPr lang="es-ES"/>
+          </a:p>
+        </p:txBody>
       </p:sp>
       <p:sp>
         <p:nvSpPr>
@@ -3334,7 +3023,7 @@
           <a:bodyPr wrap="square" lIns="0" tIns="0" rIns="0" bIns="0" rtlCol="0" anchor="ctr"/>
           <a:lstStyle/>
           <a:p>
-            <a:pPr algn="ctr" indent="0" marL="0">
+            <a:pPr marL="0" indent="0" algn="ctr">
               <a:buNone/>
             </a:pPr>
             <a:r>
@@ -3373,7 +3062,7 @@
           <a:bodyPr wrap="square" lIns="0" tIns="0" rIns="0" bIns="0" rtlCol="0" anchor="ctr"/>
           <a:lstStyle/>
           <a:p>
-            <a:pPr algn="ctr" indent="0" marL="0">
+            <a:pPr marL="0" indent="0" algn="ctr">
               <a:lnSpc>
                 <a:spcPct val="115000"/>
               </a:lnSpc>
@@ -3393,7 +3082,7 @@
             <a:endParaRPr lang="en-US" sz="1300" dirty="0"/>
           </a:p>
           <a:p>
-            <a:pPr algn="ctr" indent="0" marL="0">
+            <a:pPr marL="0" indent="0" algn="ctr">
               <a:lnSpc>
                 <a:spcPct val="115000"/>
               </a:lnSpc>
@@ -3413,7 +3102,7 @@
             <a:endParaRPr lang="en-US" sz="1300" dirty="0"/>
           </a:p>
           <a:p>
-            <a:pPr algn="ctr" indent="0" marL="0">
+            <a:pPr marL="0" indent="0" algn="ctr">
               <a:lnSpc>
                 <a:spcPct val="115000"/>
               </a:lnSpc>
@@ -3455,25 +3144,32 @@
           </a:solidFill>
           <a:ln/>
           <a:effectLst>
-            <a:outerShdw sx="100000" sy="100000" kx="0" ky="0" algn="bl" rotWithShape="0" blurRad="114300" dist="38100" dir="5400000">
+            <a:outerShdw blurRad="114300" dist="38100" dir="5400000" algn="bl" rotWithShape="0">
               <a:srgbClr val="000000">
                 <a:alpha val="16000"/>
               </a:srgbClr>
             </a:outerShdw>
           </a:effectLst>
         </p:spPr>
+        <p:txBody>
+          <a:bodyPr/>
+          <a:lstStyle/>
+          <a:p>
+            <a:endParaRPr lang="es-ES"/>
+          </a:p>
+        </p:txBody>
       </p:sp>
       <p:pic>
         <p:nvPicPr>
-          <p:cNvPr id="15" name="Image 1" descr="assets/fig_cluster_price.png">    </p:cNvPr>
+          <p:cNvPr id="15" name="Image 1" descr="assets/fig_cluster_price.png"/>
           <p:cNvPicPr>
             <a:picLocks noChangeAspect="1"/>
           </p:cNvPicPr>
           <p:nvPr/>
         </p:nvPicPr>
         <p:blipFill>
-          <a:blip r:embed="rId2"/>
-          <a:srcRect l="0" r="0" t="0" b="0"/>
+          <a:blip r:embed="rId3"/>
+          <a:srcRect/>
           <a:stretch/>
         </p:blipFill>
         <p:spPr>
@@ -3507,7 +3203,7 @@
           <a:bodyPr wrap="square" lIns="0" tIns="0" rIns="0" bIns="0" rtlCol="0" anchor="t"/>
           <a:lstStyle/>
           <a:p>
-            <a:pPr indent="0" marL="0">
+            <a:pPr marL="0" indent="0">
               <a:lnSpc>
                 <a:spcPct val="110000"/>
               </a:lnSpc>
@@ -3524,55 +3220,49 @@
               </a:rPr>
               <a:t>Implications:  </a:t>
             </a:r>
-            <a:pPr indent="0" marL="0">
+            <a:r>
+              <a:rPr lang="en-US" sz="1350" dirty="0">
+                <a:solidFill>
+                  <a:srgbClr val="5A6472"/>
+                </a:solidFill>
+                <a:latin typeface="Arial" pitchFamily="34" charset="0"/>
+                <a:ea typeface="Arial" pitchFamily="34" charset="-122"/>
+                <a:cs typeface="Arial" pitchFamily="34" charset="-120"/>
+              </a:rPr>
+              <a:t>useful for automated valuation, pricing premium listings, and targeting marketing by segment.</a:t>
+            </a:r>
+            <a:endParaRPr lang="en-US" sz="1350" dirty="0"/>
+          </a:p>
+        </p:txBody>
+      </p:sp>
+      <p:sp>
+        <p:nvSpPr>
+          <p:cNvPr id="17" name="Text 13"/>
+          <p:cNvSpPr/>
+          <p:nvPr/>
+        </p:nvSpPr>
+        <p:spPr>
+          <a:xfrm>
+            <a:off x="6400800" y="5577840"/>
+            <a:ext cx="5303520" cy="731520"/>
+          </a:xfrm>
+          <a:prstGeom prst="rect">
+            <a:avLst/>
+          </a:prstGeom>
+          <a:noFill/>
+          <a:ln/>
+        </p:spPr>
+        <p:txBody>
+          <a:bodyPr wrap="square" lIns="0" tIns="0" rIns="0" bIns="0" rtlCol="0" anchor="t"/>
+          <a:lstStyle/>
+          <a:p>
+            <a:pPr marL="0" indent="0">
               <a:lnSpc>
                 <a:spcPct val="110000"/>
               </a:lnSpc>
               <a:buNone/>
             </a:pPr>
             <a:r>
-              <a:rPr lang="en-US" sz="1350" dirty="0">
-                <a:solidFill>
-                  <a:srgbClr val="5A6472"/>
-                </a:solidFill>
-                <a:latin typeface="Arial" pitchFamily="34" charset="0"/>
-                <a:ea typeface="Arial" pitchFamily="34" charset="-122"/>
-                <a:cs typeface="Arial" pitchFamily="34" charset="-120"/>
-              </a:rPr>
-              <a:t>useful for automated valuation, pricing premium listings, and targeting marketing by segment.</a:t>
-            </a:r>
-            <a:endParaRPr lang="en-US" sz="1350" dirty="0"/>
-          </a:p>
-        </p:txBody>
-      </p:sp>
-      <p:sp>
-        <p:nvSpPr>
-          <p:cNvPr id="17" name="Text 13"/>
-          <p:cNvSpPr/>
-          <p:nvPr/>
-        </p:nvSpPr>
-        <p:spPr>
-          <a:xfrm>
-            <a:off x="6400800" y="5577840"/>
-            <a:ext cx="5303520" cy="731520"/>
-          </a:xfrm>
-          <a:prstGeom prst="rect">
-            <a:avLst/>
-          </a:prstGeom>
-          <a:noFill/>
-          <a:ln/>
-        </p:spPr>
-        <p:txBody>
-          <a:bodyPr wrap="square" lIns="0" tIns="0" rIns="0" bIns="0" rtlCol="0" anchor="t"/>
-          <a:lstStyle/>
-          <a:p>
-            <a:pPr indent="0" marL="0">
-              <a:lnSpc>
-                <a:spcPct val="110000"/>
-              </a:lnSpc>
-              <a:buNone/>
-            </a:pPr>
-            <a:r>
               <a:rPr lang="en-US" sz="1350" b="1" dirty="0">
                 <a:solidFill>
                   <a:srgbClr val="1B2230"/>
@@ -3583,12 +3273,6 @@
               </a:rPr>
               <a:t>Still open:  </a:t>
             </a:r>
-            <a:pPr indent="0" marL="0">
-              <a:lnSpc>
-                <a:spcPct val="110000"/>
-              </a:lnSpc>
-              <a:buNone/>
-            </a:pPr>
             <a:r>
               <a:rPr lang="en-US" sz="1350" dirty="0">
                 <a:solidFill>
@@ -3625,7 +3309,7 @@
           <a:bodyPr wrap="square" rtlCol="0" anchor="ctr"/>
           <a:lstStyle/>
           <a:p>
-            <a:pPr algn="l" indent="0" marL="0">
+            <a:pPr marL="0" indent="0" algn="l">
               <a:buNone/>
             </a:pPr>
             <a:r>
@@ -3664,7 +3348,7 @@
           <a:bodyPr wrap="square" rtlCol="0" anchor="ctr"/>
           <a:lstStyle/>
           <a:p>
-            <a:pPr algn="r" indent="0" marL="0">
+            <a:pPr marL="0" indent="0" algn="r">
               <a:buNone/>
             </a:pPr>
             <a:r>
@@ -3698,6 +3382,7 @@
         <a:solidFill>
           <a:srgbClr val="13132B"/>
         </a:solidFill>
+        <a:effectLst/>
       </p:bgPr>
     </p:bg>
     <p:spTree>
@@ -3714,30 +3399,6 @@
           <a:chExt cx="0" cy="0"/>
         </a:xfrm>
       </p:grpSpPr>
-      <p:pic>
-        <p:nvPicPr>
-          <p:cNvPr id="2" name="Image 0" descr="assets/mark.png">    </p:cNvPr>
-          <p:cNvPicPr>
-            <a:picLocks noChangeAspect="1"/>
-          </p:cNvPicPr>
-          <p:nvPr/>
-        </p:nvPicPr>
-        <p:blipFill>
-          <a:blip r:embed="rId1"/>
-          <a:stretch>
-            <a:fillRect/>
-          </a:stretch>
-        </p:blipFill>
-        <p:spPr>
-          <a:xfrm>
-            <a:off x="5541264" y="1371600"/>
-            <a:ext cx="1097280" cy="1097280"/>
-          </a:xfrm>
-          <a:prstGeom prst="rect">
-            <a:avLst/>
-          </a:prstGeom>
-        </p:spPr>
-      </p:pic>
       <p:sp>
         <p:nvSpPr>
           <p:cNvPr id="3" name="Text 0"/>
@@ -3759,7 +3420,7 @@
           <a:bodyPr wrap="square" lIns="0" tIns="0" rIns="0" bIns="0" rtlCol="0" anchor="ctr"/>
           <a:lstStyle/>
           <a:p>
-            <a:pPr algn="ctr" indent="0" marL="0">
+            <a:pPr marL="0" indent="0" algn="ctr">
               <a:buNone/>
             </a:pPr>
             <a:r>
@@ -3798,7 +3459,7 @@
           <a:bodyPr wrap="square" lIns="0" tIns="0" rIns="0" bIns="0" rtlCol="0" anchor="ctr"/>
           <a:lstStyle/>
           <a:p>
-            <a:pPr algn="ctr" indent="0" marL="0">
+            <a:pPr marL="0" indent="0" algn="ctr">
               <a:buNone/>
             </a:pPr>
             <a:r>
@@ -3837,7 +3498,7 @@
           <a:bodyPr wrap="square" lIns="0" tIns="0" rIns="0" bIns="0" rtlCol="0" anchor="ctr"/>
           <a:lstStyle/>
           <a:p>
-            <a:pPr algn="ctr" indent="0" marL="0">
+            <a:pPr marL="0" indent="0" algn="ctr">
               <a:buNone/>
             </a:pPr>
             <a:r>
@@ -3855,30 +3516,6 @@
           </a:p>
         </p:txBody>
       </p:sp>
-      <p:pic>
-        <p:nvPicPr>
-          <p:cNvPr id="6" name="Image 1" descr="assets/logo_teal.png">    </p:cNvPr>
-          <p:cNvPicPr>
-            <a:picLocks noChangeAspect="1"/>
-          </p:cNvPicPr>
-          <p:nvPr/>
-        </p:nvPicPr>
-        <p:blipFill>
-          <a:blip r:embed="rId2"/>
-          <a:stretch>
-            <a:fillRect/>
-          </a:stretch>
-        </p:blipFill>
-        <p:spPr>
-          <a:xfrm>
-            <a:off x="4992624" y="5212080"/>
-            <a:ext cx="2194560" cy="585216"/>
-          </a:xfrm>
-          <a:prstGeom prst="rect">
-            <a:avLst/>
-          </a:prstGeom>
-        </p:spPr>
-      </p:pic>
       <p:sp>
         <p:nvSpPr>
           <p:cNvPr id="7" name="Text 3"/>
@@ -3900,7 +3537,7 @@
           <a:bodyPr wrap="square" lIns="0" tIns="0" rIns="0" bIns="0" rtlCol="0" anchor="ctr"/>
           <a:lstStyle/>
           <a:p>
-            <a:pPr algn="ctr" indent="0" marL="0">
+            <a:pPr marL="0" indent="0" algn="ctr">
               <a:buNone/>
             </a:pPr>
             <a:r>
@@ -3912,7 +3549,7 @@
                 <a:ea typeface="Arial" pitchFamily="34" charset="-122"/>
                 <a:cs typeface="Arial" pitchFamily="34" charset="-120"/>
               </a:rPr>
-              <a:t>Daniel  ·  Ironhack Data Analytics Bootcamp</a:t>
+              <a:t>Daniel  </a:t>
             </a:r>
             <a:endParaRPr lang="en-US" sz="1300" dirty="0"/>
           </a:p>
@@ -3934,6 +3571,7 @@
         <a:solidFill>
           <a:srgbClr val="FFFFFF"/>
         </a:solidFill>
+        <a:effectLst/>
       </p:bgPr>
     </p:bg>
     <p:spTree>
@@ -3950,30 +3588,6 @@
           <a:chExt cx="0" cy="0"/>
         </a:xfrm>
       </p:grpSpPr>
-      <p:pic>
-        <p:nvPicPr>
-          <p:cNvPr id="2" name="Image 0" descr="assets/logo_navy.png">    </p:cNvPr>
-          <p:cNvPicPr>
-            <a:picLocks noChangeAspect="1"/>
-          </p:cNvPicPr>
-          <p:nvPr/>
-        </p:nvPicPr>
-        <p:blipFill>
-          <a:blip r:embed="rId1"/>
-          <a:stretch>
-            <a:fillRect/>
-          </a:stretch>
-        </p:blipFill>
-        <p:spPr>
-          <a:xfrm>
-            <a:off x="502920" y="310896"/>
-            <a:ext cx="1417320" cy="374904"/>
-          </a:xfrm>
-          <a:prstGeom prst="rect">
-            <a:avLst/>
-          </a:prstGeom>
-        </p:spPr>
-      </p:pic>
       <p:sp>
         <p:nvSpPr>
           <p:cNvPr id="3" name="Text 0"/>
@@ -3995,11 +3609,11 @@
           <a:bodyPr wrap="square" lIns="0" tIns="0" rIns="0" bIns="0" rtlCol="0" anchor="ctr"/>
           <a:lstStyle/>
           <a:p>
-            <a:pPr indent="0" marL="0">
-              <a:buNone/>
-            </a:pPr>
-            <a:r>
-              <a:rPr lang="en-US" sz="1200" b="1" spc="200" kern="0" dirty="0">
+            <a:pPr marL="0" indent="0">
+              <a:buNone/>
+            </a:pPr>
+            <a:r>
+              <a:rPr lang="en-US" sz="1200" b="1" kern="0" spc="200" dirty="0">
                 <a:solidFill>
                   <a:srgbClr val="13B9AB"/>
                 </a:solidFill>
@@ -4034,7 +3648,7 @@
           <a:bodyPr wrap="square" lIns="0" tIns="0" rIns="0" bIns="0" rtlCol="0" anchor="ctr"/>
           <a:lstStyle/>
           <a:p>
-            <a:pPr indent="0" marL="0">
+            <a:pPr marL="0" indent="0">
               <a:buNone/>
             </a:pPr>
             <a:r>
@@ -4073,7 +3687,7 @@
           <a:bodyPr wrap="square" lIns="0" tIns="0" rIns="0" bIns="0" rtlCol="0" anchor="ctr"/>
           <a:lstStyle/>
           <a:p>
-            <a:pPr indent="0" marL="0">
+            <a:pPr marL="0" indent="0">
               <a:buNone/>
             </a:pPr>
             <a:r>
@@ -4112,13 +3726,20 @@
           </a:solidFill>
           <a:ln/>
           <a:effectLst>
-            <a:outerShdw sx="100000" sy="100000" kx="0" ky="0" algn="bl" rotWithShape="0" blurRad="114300" dist="38100" dir="5400000">
+            <a:outerShdw blurRad="114300" dist="38100" dir="5400000" algn="bl" rotWithShape="0">
               <a:srgbClr val="000000">
                 <a:alpha val="16000"/>
               </a:srgbClr>
             </a:outerShdw>
           </a:effectLst>
         </p:spPr>
+        <p:txBody>
+          <a:bodyPr/>
+          <a:lstStyle/>
+          <a:p>
+            <a:endParaRPr lang="es-ES"/>
+          </a:p>
+        </p:txBody>
       </p:sp>
       <p:sp>
         <p:nvSpPr>
@@ -4141,7 +3762,7 @@
           <a:bodyPr wrap="square" lIns="0" tIns="0" rIns="0" bIns="0" rtlCol="0" anchor="ctr"/>
           <a:lstStyle/>
           <a:p>
-            <a:pPr indent="0" marL="0">
+            <a:pPr marL="0" indent="0">
               <a:buNone/>
             </a:pPr>
             <a:r>
@@ -4180,7 +3801,7 @@
           <a:bodyPr wrap="square" lIns="0" tIns="0" rIns="0" bIns="0" rtlCol="0" anchor="ctr"/>
           <a:lstStyle/>
           <a:p>
-            <a:pPr indent="0" marL="0">
+            <a:pPr marL="0" indent="0">
               <a:buNone/>
             </a:pPr>
             <a:r>
@@ -4219,7 +3840,7 @@
           <a:bodyPr wrap="square" lIns="0" tIns="0" rIns="0" bIns="0" rtlCol="0" anchor="ctr"/>
           <a:lstStyle/>
           <a:p>
-            <a:pPr indent="0" marL="0">
+            <a:pPr marL="0" indent="0">
               <a:lnSpc>
                 <a:spcPct val="105000"/>
               </a:lnSpc>
@@ -4261,13 +3882,20 @@
           </a:solidFill>
           <a:ln/>
           <a:effectLst>
-            <a:outerShdw sx="100000" sy="100000" kx="0" ky="0" algn="bl" rotWithShape="0" blurRad="114300" dist="38100" dir="5400000">
+            <a:outerShdw blurRad="114300" dist="38100" dir="5400000" algn="bl" rotWithShape="0">
               <a:srgbClr val="000000">
                 <a:alpha val="16000"/>
               </a:srgbClr>
             </a:outerShdw>
           </a:effectLst>
         </p:spPr>
+        <p:txBody>
+          <a:bodyPr/>
+          <a:lstStyle/>
+          <a:p>
+            <a:endParaRPr lang="es-ES"/>
+          </a:p>
+        </p:txBody>
       </p:sp>
       <p:sp>
         <p:nvSpPr>
@@ -4290,7 +3918,7 @@
           <a:bodyPr wrap="square" lIns="0" tIns="0" rIns="0" bIns="0" rtlCol="0" anchor="ctr"/>
           <a:lstStyle/>
           <a:p>
-            <a:pPr indent="0" marL="0">
+            <a:pPr marL="0" indent="0">
               <a:buNone/>
             </a:pPr>
             <a:r>
@@ -4329,7 +3957,7 @@
           <a:bodyPr wrap="square" lIns="0" tIns="0" rIns="0" bIns="0" rtlCol="0" anchor="ctr"/>
           <a:lstStyle/>
           <a:p>
-            <a:pPr indent="0" marL="0">
+            <a:pPr marL="0" indent="0">
               <a:buNone/>
             </a:pPr>
             <a:r>
@@ -4368,7 +3996,7 @@
           <a:bodyPr wrap="square" lIns="0" tIns="0" rIns="0" bIns="0" rtlCol="0" anchor="ctr"/>
           <a:lstStyle/>
           <a:p>
-            <a:pPr indent="0" marL="0">
+            <a:pPr marL="0" indent="0">
               <a:lnSpc>
                 <a:spcPct val="105000"/>
               </a:lnSpc>
@@ -4410,13 +4038,20 @@
           </a:solidFill>
           <a:ln/>
           <a:effectLst>
-            <a:outerShdw sx="100000" sy="100000" kx="0" ky="0" algn="bl" rotWithShape="0" blurRad="114300" dist="38100" dir="5400000">
+            <a:outerShdw blurRad="114300" dist="38100" dir="5400000" algn="bl" rotWithShape="0">
               <a:srgbClr val="000000">
                 <a:alpha val="16000"/>
               </a:srgbClr>
             </a:outerShdw>
           </a:effectLst>
         </p:spPr>
+        <p:txBody>
+          <a:bodyPr/>
+          <a:lstStyle/>
+          <a:p>
+            <a:endParaRPr lang="es-ES"/>
+          </a:p>
+        </p:txBody>
       </p:sp>
       <p:sp>
         <p:nvSpPr>
@@ -4439,7 +4074,7 @@
           <a:bodyPr wrap="square" lIns="0" tIns="0" rIns="0" bIns="0" rtlCol="0" anchor="ctr"/>
           <a:lstStyle/>
           <a:p>
-            <a:pPr indent="0" marL="0">
+            <a:pPr marL="0" indent="0">
               <a:buNone/>
             </a:pPr>
             <a:r>
@@ -4478,7 +4113,7 @@
           <a:bodyPr wrap="square" lIns="0" tIns="0" rIns="0" bIns="0" rtlCol="0" anchor="ctr"/>
           <a:lstStyle/>
           <a:p>
-            <a:pPr indent="0" marL="0">
+            <a:pPr marL="0" indent="0">
               <a:buNone/>
             </a:pPr>
             <a:r>
@@ -4517,7 +4152,7 @@
           <a:bodyPr wrap="square" lIns="0" tIns="0" rIns="0" bIns="0" rtlCol="0" anchor="ctr"/>
           <a:lstStyle/>
           <a:p>
-            <a:pPr indent="0" marL="0">
+            <a:pPr marL="0" indent="0">
               <a:lnSpc>
                 <a:spcPct val="105000"/>
               </a:lnSpc>
@@ -4559,7 +4194,7 @@
           <a:bodyPr wrap="square" rtlCol="0" anchor="ctr"/>
           <a:lstStyle/>
           <a:p>
-            <a:pPr algn="l" indent="0" marL="0">
+            <a:pPr marL="0" indent="0" algn="l">
               <a:buNone/>
             </a:pPr>
             <a:r>
@@ -4598,7 +4233,7 @@
           <a:bodyPr wrap="square" rtlCol="0" anchor="ctr"/>
           <a:lstStyle/>
           <a:p>
-            <a:pPr algn="r" indent="0" marL="0">
+            <a:pPr marL="0" indent="0" algn="r">
               <a:buNone/>
             </a:pPr>
             <a:r>
@@ -4632,6 +4267,7 @@
         <a:solidFill>
           <a:srgbClr val="FFFFFF"/>
         </a:solidFill>
+        <a:effectLst/>
       </p:bgPr>
     </p:bg>
     <p:spTree>
@@ -4648,30 +4284,6 @@
           <a:chExt cx="0" cy="0"/>
         </a:xfrm>
       </p:grpSpPr>
-      <p:pic>
-        <p:nvPicPr>
-          <p:cNvPr id="2" name="Image 0" descr="assets/logo_navy.png">    </p:cNvPr>
-          <p:cNvPicPr>
-            <a:picLocks noChangeAspect="1"/>
-          </p:cNvPicPr>
-          <p:nvPr/>
-        </p:nvPicPr>
-        <p:blipFill>
-          <a:blip r:embed="rId1"/>
-          <a:stretch>
-            <a:fillRect/>
-          </a:stretch>
-        </p:blipFill>
-        <p:spPr>
-          <a:xfrm>
-            <a:off x="502920" y="310896"/>
-            <a:ext cx="1417320" cy="374904"/>
-          </a:xfrm>
-          <a:prstGeom prst="rect">
-            <a:avLst/>
-          </a:prstGeom>
-        </p:spPr>
-      </p:pic>
       <p:sp>
         <p:nvSpPr>
           <p:cNvPr id="3" name="Text 0"/>
@@ -4693,11 +4305,11 @@
           <a:bodyPr wrap="square" lIns="0" tIns="0" rIns="0" bIns="0" rtlCol="0" anchor="ctr"/>
           <a:lstStyle/>
           <a:p>
-            <a:pPr indent="0" marL="0">
-              <a:buNone/>
-            </a:pPr>
-            <a:r>
-              <a:rPr lang="en-US" sz="1200" b="1" spc="200" kern="0" dirty="0">
+            <a:pPr marL="0" indent="0">
+              <a:buNone/>
+            </a:pPr>
+            <a:r>
+              <a:rPr lang="en-US" sz="1200" b="1" kern="0" spc="200" dirty="0">
                 <a:solidFill>
                   <a:srgbClr val="13B9AB"/>
                 </a:solidFill>
@@ -4732,7 +4344,7 @@
           <a:bodyPr wrap="square" lIns="0" tIns="0" rIns="0" bIns="0" rtlCol="0" anchor="ctr"/>
           <a:lstStyle/>
           <a:p>
-            <a:pPr indent="0" marL="0">
+            <a:pPr marL="0" indent="0">
               <a:buNone/>
             </a:pPr>
             <a:r>
@@ -4771,13 +4383,20 @@
           </a:solidFill>
           <a:ln/>
           <a:effectLst>
-            <a:outerShdw sx="100000" sy="100000" kx="0" ky="0" algn="bl" rotWithShape="0" blurRad="114300" dist="38100" dir="5400000">
+            <a:outerShdw blurRad="114300" dist="38100" dir="5400000" algn="bl" rotWithShape="0">
               <a:srgbClr val="000000">
                 <a:alpha val="16000"/>
               </a:srgbClr>
             </a:outerShdw>
           </a:effectLst>
         </p:spPr>
+        <p:txBody>
+          <a:bodyPr/>
+          <a:lstStyle/>
+          <a:p>
+            <a:endParaRPr lang="es-ES"/>
+          </a:p>
+        </p:txBody>
       </p:sp>
       <p:sp>
         <p:nvSpPr>
@@ -4800,7 +4419,7 @@
           <a:bodyPr wrap="square" lIns="0" tIns="0" rIns="0" bIns="0" rtlCol="0" anchor="ctr"/>
           <a:lstStyle/>
           <a:p>
-            <a:pPr algn="ctr" indent="0" marL="0">
+            <a:pPr marL="0" indent="0" algn="ctr">
               <a:buNone/>
             </a:pPr>
             <a:r>
@@ -4839,7 +4458,7 @@
           <a:bodyPr wrap="square" lIns="0" tIns="0" rIns="0" bIns="0" rtlCol="0" anchor="ctr"/>
           <a:lstStyle/>
           <a:p>
-            <a:pPr algn="ctr" indent="0" marL="0">
+            <a:pPr marL="0" indent="0" algn="ctr">
               <a:buNone/>
             </a:pPr>
             <a:r>
@@ -4878,13 +4497,20 @@
           </a:solidFill>
           <a:ln/>
           <a:effectLst>
-            <a:outerShdw sx="100000" sy="100000" kx="0" ky="0" algn="bl" rotWithShape="0" blurRad="114300" dist="38100" dir="5400000">
+            <a:outerShdw blurRad="114300" dist="38100" dir="5400000" algn="bl" rotWithShape="0">
               <a:srgbClr val="000000">
                 <a:alpha val="16000"/>
               </a:srgbClr>
             </a:outerShdw>
           </a:effectLst>
         </p:spPr>
+        <p:txBody>
+          <a:bodyPr/>
+          <a:lstStyle/>
+          <a:p>
+            <a:endParaRPr lang="es-ES"/>
+          </a:p>
+        </p:txBody>
       </p:sp>
       <p:sp>
         <p:nvSpPr>
@@ -4907,7 +4533,7 @@
           <a:bodyPr wrap="square" lIns="0" tIns="0" rIns="0" bIns="0" rtlCol="0" anchor="ctr"/>
           <a:lstStyle/>
           <a:p>
-            <a:pPr algn="ctr" indent="0" marL="0">
+            <a:pPr marL="0" indent="0" algn="ctr">
               <a:buNone/>
             </a:pPr>
             <a:r>
@@ -4946,7 +4572,7 @@
           <a:bodyPr wrap="square" lIns="0" tIns="0" rIns="0" bIns="0" rtlCol="0" anchor="ctr"/>
           <a:lstStyle/>
           <a:p>
-            <a:pPr algn="ctr" indent="0" marL="0">
+            <a:pPr marL="0" indent="0" algn="ctr">
               <a:buNone/>
             </a:pPr>
             <a:r>
@@ -4985,13 +4611,20 @@
           </a:solidFill>
           <a:ln/>
           <a:effectLst>
-            <a:outerShdw sx="100000" sy="100000" kx="0" ky="0" algn="bl" rotWithShape="0" blurRad="114300" dist="38100" dir="5400000">
+            <a:outerShdw blurRad="114300" dist="38100" dir="5400000" algn="bl" rotWithShape="0">
               <a:srgbClr val="000000">
                 <a:alpha val="16000"/>
               </a:srgbClr>
             </a:outerShdw>
           </a:effectLst>
         </p:spPr>
+        <p:txBody>
+          <a:bodyPr/>
+          <a:lstStyle/>
+          <a:p>
+            <a:endParaRPr lang="es-ES"/>
+          </a:p>
+        </p:txBody>
       </p:sp>
       <p:sp>
         <p:nvSpPr>
@@ -5014,7 +4647,7 @@
           <a:bodyPr wrap="square" lIns="0" tIns="0" rIns="0" bIns="0" rtlCol="0" anchor="ctr"/>
           <a:lstStyle/>
           <a:p>
-            <a:pPr algn="ctr" indent="0" marL="0">
+            <a:pPr marL="0" indent="0" algn="ctr">
               <a:buNone/>
             </a:pPr>
             <a:r>
@@ -5053,7 +4686,7 @@
           <a:bodyPr wrap="square" lIns="0" tIns="0" rIns="0" bIns="0" rtlCol="0" anchor="ctr"/>
           <a:lstStyle/>
           <a:p>
-            <a:pPr algn="ctr" indent="0" marL="0">
+            <a:pPr marL="0" indent="0" algn="ctr">
               <a:buNone/>
             </a:pPr>
             <a:r>
@@ -5092,13 +4725,20 @@
           </a:solidFill>
           <a:ln/>
           <a:effectLst>
-            <a:outerShdw sx="100000" sy="100000" kx="0" ky="0" algn="bl" rotWithShape="0" blurRad="114300" dist="38100" dir="5400000">
+            <a:outerShdw blurRad="114300" dist="38100" dir="5400000" algn="bl" rotWithShape="0">
               <a:srgbClr val="000000">
                 <a:alpha val="16000"/>
               </a:srgbClr>
             </a:outerShdw>
           </a:effectLst>
         </p:spPr>
+        <p:txBody>
+          <a:bodyPr/>
+          <a:lstStyle/>
+          <a:p>
+            <a:endParaRPr lang="es-ES"/>
+          </a:p>
+        </p:txBody>
       </p:sp>
       <p:sp>
         <p:nvSpPr>
@@ -5121,7 +4761,7 @@
           <a:bodyPr wrap="square" lIns="0" tIns="0" rIns="0" bIns="0" rtlCol="0" anchor="ctr"/>
           <a:lstStyle/>
           <a:p>
-            <a:pPr algn="ctr" indent="0" marL="0">
+            <a:pPr marL="0" indent="0" algn="ctr">
               <a:buNone/>
             </a:pPr>
             <a:r>
@@ -5160,7 +4800,7 @@
           <a:bodyPr wrap="square" lIns="0" tIns="0" rIns="0" bIns="0" rtlCol="0" anchor="ctr"/>
           <a:lstStyle/>
           <a:p>
-            <a:pPr algn="ctr" indent="0" marL="0">
+            <a:pPr marL="0" indent="0" algn="ctr">
               <a:buNone/>
             </a:pPr>
             <a:r>
@@ -5199,7 +4839,7 @@
           <a:bodyPr wrap="square" lIns="0" tIns="0" rIns="0" bIns="0" rtlCol="0" anchor="t"/>
           <a:lstStyle/>
           <a:p>
-            <a:pPr indent="0" marL="0">
+            <a:pPr marL="0" indent="0">
               <a:lnSpc>
                 <a:spcPct val="115000"/>
               </a:lnSpc>
@@ -5216,12 +4856,6 @@
               </a:rPr>
               <a:t>Right‑skewed target.  </a:t>
             </a:r>
-            <a:pPr indent="0" marL="0">
-              <a:lnSpc>
-                <a:spcPct val="115000"/>
-              </a:lnSpc>
-              <a:buNone/>
-            </a:pPr>
             <a:r>
               <a:rPr lang="en-US" sz="1500" dirty="0">
                 <a:solidFill>
@@ -5233,12 +4867,6 @@
               </a:rPr>
               <a:t>Most homes sell in the low‑to‑mid range with a long tail of very expensive properties (up to $7.7M). A </a:t>
             </a:r>
-            <a:pPr indent="0" marL="0">
-              <a:lnSpc>
-                <a:spcPct val="115000"/>
-              </a:lnSpc>
-              <a:buNone/>
-            </a:pPr>
             <a:r>
               <a:rPr lang="en-US" sz="1500" b="1" dirty="0">
                 <a:solidFill>
@@ -5250,12 +4878,6 @@
               </a:rPr>
               <a:t>log transformation</a:t>
             </a:r>
-            <a:pPr indent="0" marL="0">
-              <a:lnSpc>
-                <a:spcPct val="115000"/>
-              </a:lnSpc>
-              <a:buNone/>
-            </a:pPr>
             <a:r>
               <a:rPr lang="en-US" sz="1500" dirty="0">
                 <a:solidFill>
@@ -5292,25 +4914,32 @@
           </a:solidFill>
           <a:ln/>
           <a:effectLst>
-            <a:outerShdw sx="100000" sy="100000" kx="0" ky="0" algn="bl" rotWithShape="0" blurRad="114300" dist="38100" dir="5400000">
+            <a:outerShdw blurRad="114300" dist="38100" dir="5400000" algn="bl" rotWithShape="0">
               <a:srgbClr val="000000">
                 <a:alpha val="16000"/>
               </a:srgbClr>
             </a:outerShdw>
           </a:effectLst>
         </p:spPr>
+        <p:txBody>
+          <a:bodyPr/>
+          <a:lstStyle/>
+          <a:p>
+            <a:endParaRPr lang="es-ES"/>
+          </a:p>
+        </p:txBody>
       </p:sp>
       <p:pic>
         <p:nvPicPr>
-          <p:cNvPr id="19" name="Image 1" descr="assets/fig_price_dist.png">    </p:cNvPr>
+          <p:cNvPr id="19" name="Image 1" descr="assets/fig_price_dist.png"/>
           <p:cNvPicPr>
             <a:picLocks noChangeAspect="1"/>
           </p:cNvPicPr>
           <p:nvPr/>
         </p:nvPicPr>
         <p:blipFill>
-          <a:blip r:embed="rId2"/>
-          <a:srcRect l="0" r="0" t="0" b="0"/>
+          <a:blip r:embed="rId3"/>
+          <a:srcRect/>
           <a:stretch/>
         </p:blipFill>
         <p:spPr>
@@ -5344,7 +4973,7 @@
           <a:bodyPr wrap="square" rtlCol="0" anchor="ctr"/>
           <a:lstStyle/>
           <a:p>
-            <a:pPr algn="l" indent="0" marL="0">
+            <a:pPr marL="0" indent="0" algn="l">
               <a:buNone/>
             </a:pPr>
             <a:r>
@@ -5383,7 +5012,7 @@
           <a:bodyPr wrap="square" rtlCol="0" anchor="ctr"/>
           <a:lstStyle/>
           <a:p>
-            <a:pPr algn="r" indent="0" marL="0">
+            <a:pPr marL="0" indent="0" algn="r">
               <a:buNone/>
             </a:pPr>
             <a:r>
@@ -5417,6 +5046,7 @@
         <a:solidFill>
           <a:srgbClr val="FFFFFF"/>
         </a:solidFill>
+        <a:effectLst/>
       </p:bgPr>
     </p:bg>
     <p:spTree>
@@ -5433,30 +5063,6 @@
           <a:chExt cx="0" cy="0"/>
         </a:xfrm>
       </p:grpSpPr>
-      <p:pic>
-        <p:nvPicPr>
-          <p:cNvPr id="2" name="Image 0" descr="assets/logo_navy.png">    </p:cNvPr>
-          <p:cNvPicPr>
-            <a:picLocks noChangeAspect="1"/>
-          </p:cNvPicPr>
-          <p:nvPr/>
-        </p:nvPicPr>
-        <p:blipFill>
-          <a:blip r:embed="rId1"/>
-          <a:stretch>
-            <a:fillRect/>
-          </a:stretch>
-        </p:blipFill>
-        <p:spPr>
-          <a:xfrm>
-            <a:off x="502920" y="310896"/>
-            <a:ext cx="1417320" cy="374904"/>
-          </a:xfrm>
-          <a:prstGeom prst="rect">
-            <a:avLst/>
-          </a:prstGeom>
-        </p:spPr>
-      </p:pic>
       <p:sp>
         <p:nvSpPr>
           <p:cNvPr id="3" name="Text 0"/>
@@ -5478,11 +5084,11 @@
           <a:bodyPr wrap="square" lIns="0" tIns="0" rIns="0" bIns="0" rtlCol="0" anchor="ctr"/>
           <a:lstStyle/>
           <a:p>
-            <a:pPr indent="0" marL="0">
-              <a:buNone/>
-            </a:pPr>
-            <a:r>
-              <a:rPr lang="en-US" sz="1200" b="1" spc="200" kern="0" dirty="0">
+            <a:pPr marL="0" indent="0">
+              <a:buNone/>
+            </a:pPr>
+            <a:r>
+              <a:rPr lang="en-US" sz="1200" b="1" kern="0" spc="200" dirty="0">
                 <a:solidFill>
                   <a:srgbClr val="13B9AB"/>
                 </a:solidFill>
@@ -5517,7 +5123,7 @@
           <a:bodyPr wrap="square" lIns="0" tIns="0" rIns="0" bIns="0" rtlCol="0" anchor="ctr"/>
           <a:lstStyle/>
           <a:p>
-            <a:pPr indent="0" marL="0">
+            <a:pPr marL="0" indent="0">
               <a:buNone/>
             </a:pPr>
             <a:r>
@@ -5556,13 +5162,20 @@
           </a:solidFill>
           <a:ln/>
           <a:effectLst>
-            <a:outerShdw sx="100000" sy="100000" kx="0" ky="0" algn="bl" rotWithShape="0" blurRad="114300" dist="38100" dir="5400000">
+            <a:outerShdw blurRad="114300" dist="38100" dir="5400000" algn="bl" rotWithShape="0">
               <a:srgbClr val="000000">
                 <a:alpha val="16000"/>
               </a:srgbClr>
             </a:outerShdw>
           </a:effectLst>
         </p:spPr>
+        <p:txBody>
+          <a:bodyPr/>
+          <a:lstStyle/>
+          <a:p>
+            <a:endParaRPr lang="es-ES"/>
+          </a:p>
+        </p:txBody>
       </p:sp>
       <p:sp>
         <p:nvSpPr>
@@ -5585,7 +5198,7 @@
           <a:bodyPr wrap="square" lIns="0" tIns="0" rIns="0" bIns="0" rtlCol="0" anchor="ctr"/>
           <a:lstStyle/>
           <a:p>
-            <a:pPr algn="ctr" indent="0" marL="0">
+            <a:pPr marL="0" indent="0" algn="ctr">
               <a:lnSpc>
                 <a:spcPct val="95000"/>
               </a:lnSpc>
@@ -5605,7 +5218,7 @@
             <a:endParaRPr lang="en-US" sz="1300" dirty="0"/>
           </a:p>
           <a:p>
-            <a:pPr algn="ctr" indent="0" marL="0">
+            <a:pPr marL="0" indent="0" algn="ctr">
               <a:lnSpc>
                 <a:spcPct val="95000"/>
               </a:lnSpc>
@@ -5647,7 +5260,7 @@
           <a:bodyPr wrap="square" lIns="0" tIns="0" rIns="0" bIns="0" rtlCol="0" anchor="ctr"/>
           <a:lstStyle/>
           <a:p>
-            <a:pPr algn="ctr" indent="0" marL="0">
+            <a:pPr marL="0" indent="0" algn="ctr">
               <a:buNone/>
             </a:pPr>
             <a:r>
@@ -5686,13 +5299,20 @@
           </a:solidFill>
           <a:ln/>
           <a:effectLst>
-            <a:outerShdw sx="100000" sy="100000" kx="0" ky="0" algn="bl" rotWithShape="0" blurRad="114300" dist="38100" dir="5400000">
+            <a:outerShdw blurRad="114300" dist="38100" dir="5400000" algn="bl" rotWithShape="0">
               <a:srgbClr val="000000">
                 <a:alpha val="16000"/>
               </a:srgbClr>
             </a:outerShdw>
           </a:effectLst>
         </p:spPr>
+        <p:txBody>
+          <a:bodyPr/>
+          <a:lstStyle/>
+          <a:p>
+            <a:endParaRPr lang="es-ES"/>
+          </a:p>
+        </p:txBody>
       </p:sp>
       <p:sp>
         <p:nvSpPr>
@@ -5715,7 +5335,7 @@
           <a:bodyPr wrap="square" lIns="0" tIns="0" rIns="0" bIns="0" rtlCol="0" anchor="ctr"/>
           <a:lstStyle/>
           <a:p>
-            <a:pPr algn="ctr" indent="0" marL="0">
+            <a:pPr marL="0" indent="0" algn="ctr">
               <a:lnSpc>
                 <a:spcPct val="95000"/>
               </a:lnSpc>
@@ -5735,7 +5355,7 @@
             <a:endParaRPr lang="en-US" sz="1300" dirty="0"/>
           </a:p>
           <a:p>
-            <a:pPr algn="ctr" indent="0" marL="0">
+            <a:pPr marL="0" indent="0" algn="ctr">
               <a:lnSpc>
                 <a:spcPct val="95000"/>
               </a:lnSpc>
@@ -5777,7 +5397,7 @@
           <a:bodyPr wrap="square" lIns="0" tIns="0" rIns="0" bIns="0" rtlCol="0" anchor="ctr"/>
           <a:lstStyle/>
           <a:p>
-            <a:pPr algn="ctr" indent="0" marL="0">
+            <a:pPr marL="0" indent="0" algn="ctr">
               <a:buNone/>
             </a:pPr>
             <a:r>
@@ -5816,13 +5436,20 @@
           </a:solidFill>
           <a:ln/>
           <a:effectLst>
-            <a:outerShdw sx="100000" sy="100000" kx="0" ky="0" algn="bl" rotWithShape="0" blurRad="114300" dist="38100" dir="5400000">
+            <a:outerShdw blurRad="114300" dist="38100" dir="5400000" algn="bl" rotWithShape="0">
               <a:srgbClr val="000000">
                 <a:alpha val="16000"/>
               </a:srgbClr>
             </a:outerShdw>
           </a:effectLst>
         </p:spPr>
+        <p:txBody>
+          <a:bodyPr/>
+          <a:lstStyle/>
+          <a:p>
+            <a:endParaRPr lang="es-ES"/>
+          </a:p>
+        </p:txBody>
       </p:sp>
       <p:sp>
         <p:nvSpPr>
@@ -5845,7 +5472,7 @@
           <a:bodyPr wrap="square" lIns="0" tIns="0" rIns="0" bIns="0" rtlCol="0" anchor="ctr"/>
           <a:lstStyle/>
           <a:p>
-            <a:pPr algn="ctr" indent="0" marL="0">
+            <a:pPr marL="0" indent="0" algn="ctr">
               <a:lnSpc>
                 <a:spcPct val="95000"/>
               </a:lnSpc>
@@ -5865,7 +5492,7 @@
             <a:endParaRPr lang="en-US" sz="1300" dirty="0"/>
           </a:p>
           <a:p>
-            <a:pPr algn="ctr" indent="0" marL="0">
+            <a:pPr marL="0" indent="0" algn="ctr">
               <a:lnSpc>
                 <a:spcPct val="95000"/>
               </a:lnSpc>
@@ -5907,7 +5534,7 @@
           <a:bodyPr wrap="square" lIns="0" tIns="0" rIns="0" bIns="0" rtlCol="0" anchor="ctr"/>
           <a:lstStyle/>
           <a:p>
-            <a:pPr algn="ctr" indent="0" marL="0">
+            <a:pPr marL="0" indent="0" algn="ctr">
               <a:buNone/>
             </a:pPr>
             <a:r>
@@ -5946,13 +5573,20 @@
           </a:solidFill>
           <a:ln/>
           <a:effectLst>
-            <a:outerShdw sx="100000" sy="100000" kx="0" ky="0" algn="bl" rotWithShape="0" blurRad="114300" dist="38100" dir="5400000">
+            <a:outerShdw blurRad="114300" dist="38100" dir="5400000" algn="bl" rotWithShape="0">
               <a:srgbClr val="000000">
                 <a:alpha val="16000"/>
               </a:srgbClr>
             </a:outerShdw>
           </a:effectLst>
         </p:spPr>
+        <p:txBody>
+          <a:bodyPr/>
+          <a:lstStyle/>
+          <a:p>
+            <a:endParaRPr lang="es-ES"/>
+          </a:p>
+        </p:txBody>
       </p:sp>
       <p:sp>
         <p:nvSpPr>
@@ -5975,7 +5609,7 @@
           <a:bodyPr wrap="square" lIns="0" tIns="0" rIns="0" bIns="0" rtlCol="0" anchor="ctr"/>
           <a:lstStyle/>
           <a:p>
-            <a:pPr algn="ctr" indent="0" marL="0">
+            <a:pPr marL="0" indent="0" algn="ctr">
               <a:lnSpc>
                 <a:spcPct val="95000"/>
               </a:lnSpc>
@@ -5995,7 +5629,7 @@
             <a:endParaRPr lang="en-US" sz="1300" dirty="0"/>
           </a:p>
           <a:p>
-            <a:pPr algn="ctr" indent="0" marL="0">
+            <a:pPr marL="0" indent="0" algn="ctr">
               <a:lnSpc>
                 <a:spcPct val="95000"/>
               </a:lnSpc>
@@ -6037,7 +5671,7 @@
           <a:bodyPr wrap="square" lIns="0" tIns="0" rIns="0" bIns="0" rtlCol="0" anchor="ctr"/>
           <a:lstStyle/>
           <a:p>
-            <a:pPr algn="ctr" indent="0" marL="0">
+            <a:pPr marL="0" indent="0" algn="ctr">
               <a:buNone/>
             </a:pPr>
             <a:r>
@@ -6076,13 +5710,20 @@
           </a:solidFill>
           <a:ln/>
           <a:effectLst>
-            <a:outerShdw sx="100000" sy="100000" kx="0" ky="0" algn="bl" rotWithShape="0" blurRad="114300" dist="38100" dir="5400000">
+            <a:outerShdw blurRad="114300" dist="38100" dir="5400000" algn="bl" rotWithShape="0">
               <a:srgbClr val="000000">
                 <a:alpha val="16000"/>
               </a:srgbClr>
             </a:outerShdw>
           </a:effectLst>
         </p:spPr>
+        <p:txBody>
+          <a:bodyPr/>
+          <a:lstStyle/>
+          <a:p>
+            <a:endParaRPr lang="es-ES"/>
+          </a:p>
+        </p:txBody>
       </p:sp>
       <p:sp>
         <p:nvSpPr>
@@ -6105,7 +5746,7 @@
           <a:bodyPr wrap="square" lIns="0" tIns="0" rIns="0" bIns="0" rtlCol="0" anchor="ctr"/>
           <a:lstStyle/>
           <a:p>
-            <a:pPr algn="ctr" indent="0" marL="0">
+            <a:pPr marL="0" indent="0" algn="ctr">
               <a:lnSpc>
                 <a:spcPct val="95000"/>
               </a:lnSpc>
@@ -6125,7 +5766,7 @@
             <a:endParaRPr lang="en-US" sz="1300" dirty="0"/>
           </a:p>
           <a:p>
-            <a:pPr algn="ctr" indent="0" marL="0">
+            <a:pPr marL="0" indent="0" algn="ctr">
               <a:lnSpc>
                 <a:spcPct val="95000"/>
               </a:lnSpc>
@@ -6167,7 +5808,7 @@
           <a:bodyPr wrap="square" lIns="0" tIns="0" rIns="0" bIns="0" rtlCol="0" anchor="ctr"/>
           <a:lstStyle/>
           <a:p>
-            <a:pPr indent="0" marL="0">
+            <a:pPr marL="0" indent="0">
               <a:buNone/>
             </a:pPr>
             <a:r>
@@ -6206,7 +5847,7 @@
           <a:bodyPr wrap="square" lIns="0" tIns="0" rIns="0" bIns="0" rtlCol="0" anchor="t"/>
           <a:lstStyle/>
           <a:p>
-            <a:pPr indent="0" marL="0">
+            <a:pPr marL="0" indent="0">
               <a:lnSpc>
                 <a:spcPct val="112000"/>
               </a:lnSpc>
@@ -6226,7 +5867,7 @@
             <a:endParaRPr lang="en-US" sz="1400" dirty="0"/>
           </a:p>
           <a:p>
-            <a:pPr indent="0" marL="0">
+            <a:pPr marL="0" indent="0">
               <a:lnSpc>
                 <a:spcPct val="112000"/>
               </a:lnSpc>
@@ -6246,7 +5887,7 @@
             <a:endParaRPr lang="en-US" sz="1400" dirty="0"/>
           </a:p>
           <a:p>
-            <a:pPr indent="0" marL="0">
+            <a:pPr marL="0" indent="0">
               <a:lnSpc>
                 <a:spcPct val="112000"/>
               </a:lnSpc>
@@ -6266,7 +5907,7 @@
             <a:endParaRPr lang="en-US" sz="1400" dirty="0"/>
           </a:p>
           <a:p>
-            <a:pPr indent="0" marL="0">
+            <a:pPr marL="0" indent="0">
               <a:lnSpc>
                 <a:spcPct val="112000"/>
               </a:lnSpc>
@@ -6286,7 +5927,7 @@
             <a:endParaRPr lang="en-US" sz="1400" dirty="0"/>
           </a:p>
           <a:p>
-            <a:pPr indent="0" marL="0">
+            <a:pPr marL="0" indent="0">
               <a:lnSpc>
                 <a:spcPct val="112000"/>
               </a:lnSpc>
@@ -6306,7 +5947,7 @@
             <a:endParaRPr lang="en-US" sz="1400" dirty="0"/>
           </a:p>
           <a:p>
-            <a:pPr indent="0" marL="0">
+            <a:pPr marL="0" indent="0">
               <a:lnSpc>
                 <a:spcPct val="112000"/>
               </a:lnSpc>
@@ -6326,7 +5967,7 @@
             <a:endParaRPr lang="en-US" sz="1400" dirty="0"/>
           </a:p>
           <a:p>
-            <a:pPr indent="0" marL="0">
+            <a:pPr marL="0" indent="0">
               <a:lnSpc>
                 <a:spcPct val="112000"/>
               </a:lnSpc>
@@ -6346,7 +5987,7 @@
             <a:endParaRPr lang="en-US" sz="1400" dirty="0"/>
           </a:p>
           <a:p>
-            <a:pPr indent="0" marL="0">
+            <a:pPr marL="0" indent="0">
               <a:lnSpc>
                 <a:spcPct val="112000"/>
               </a:lnSpc>
@@ -6388,13 +6029,20 @@
           </a:solidFill>
           <a:ln/>
           <a:effectLst>
-            <a:outerShdw sx="100000" sy="100000" kx="0" ky="0" algn="bl" rotWithShape="0" blurRad="114300" dist="38100" dir="5400000">
+            <a:outerShdw blurRad="114300" dist="38100" dir="5400000" algn="bl" rotWithShape="0">
               <a:srgbClr val="000000">
                 <a:alpha val="16000"/>
               </a:srgbClr>
             </a:outerShdw>
           </a:effectLst>
         </p:spPr>
+        <p:txBody>
+          <a:bodyPr/>
+          <a:lstStyle/>
+          <a:p>
+            <a:endParaRPr lang="es-ES"/>
+          </a:p>
+        </p:txBody>
       </p:sp>
       <p:sp>
         <p:nvSpPr>
@@ -6417,7 +6065,7 @@
           <a:bodyPr wrap="square" lIns="0" tIns="0" rIns="0" bIns="0" rtlCol="0" anchor="ctr"/>
           <a:lstStyle/>
           <a:p>
-            <a:pPr indent="0" marL="0">
+            <a:pPr marL="0" indent="0">
               <a:buNone/>
             </a:pPr>
             <a:r>
@@ -6456,7 +6104,7 @@
           <a:bodyPr wrap="square" lIns="0" tIns="0" rIns="0" bIns="0" rtlCol="0" anchor="t"/>
           <a:lstStyle/>
           <a:p>
-            <a:pPr indent="0" marL="0">
+            <a:pPr marL="0" indent="0">
               <a:lnSpc>
                 <a:spcPct val="118000"/>
               </a:lnSpc>
@@ -6473,12 +6121,6 @@
               </a:rPr>
               <a:t>Features built from price (</a:t>
             </a:r>
-            <a:pPr indent="0" marL="0">
-              <a:lnSpc>
-                <a:spcPct val="118000"/>
-              </a:lnSpc>
-              <a:buNone/>
-            </a:pPr>
             <a:r>
               <a:rPr lang="en-US" sz="1450" i="1" dirty="0">
                 <a:solidFill>
@@ -6490,12 +6132,6 @@
               </a:rPr>
               <a:t>log_price, luxury_home, price_per_sqft</a:t>
             </a:r>
-            <a:pPr indent="0" marL="0">
-              <a:lnSpc>
-                <a:spcPct val="118000"/>
-              </a:lnSpc>
-              <a:buNone/>
-            </a:pPr>
             <a:r>
               <a:rPr lang="en-US" sz="1450" dirty="0">
                 <a:solidFill>
@@ -6507,12 +6143,6 @@
               </a:rPr>
               <a:t>) plus IDs and dates are </a:t>
             </a:r>
-            <a:pPr indent="0" marL="0">
-              <a:lnSpc>
-                <a:spcPct val="118000"/>
-              </a:lnSpc>
-              <a:buNone/>
-            </a:pPr>
             <a:r>
               <a:rPr lang="en-US" sz="1450" b="1" dirty="0">
                 <a:solidFill>
@@ -6524,12 +6154,6 @@
               </a:rPr>
               <a:t>dropped from the predictors</a:t>
             </a:r>
-            <a:pPr indent="0" marL="0">
-              <a:lnSpc>
-                <a:spcPct val="118000"/>
-              </a:lnSpc>
-              <a:buNone/>
-            </a:pPr>
             <a:r>
               <a:rPr lang="en-US" sz="1450" dirty="0">
                 <a:solidFill>
@@ -6566,7 +6190,7 @@
           <a:bodyPr wrap="square" rtlCol="0" anchor="ctr"/>
           <a:lstStyle/>
           <a:p>
-            <a:pPr algn="l" indent="0" marL="0">
+            <a:pPr marL="0" indent="0" algn="l">
               <a:buNone/>
             </a:pPr>
             <a:r>
@@ -6605,7 +6229,7 @@
           <a:bodyPr wrap="square" rtlCol="0" anchor="ctr"/>
           <a:lstStyle/>
           <a:p>
-            <a:pPr algn="r" indent="0" marL="0">
+            <a:pPr marL="0" indent="0" algn="r">
               <a:buNone/>
             </a:pPr>
             <a:r>
@@ -6639,6 +6263,7 @@
         <a:solidFill>
           <a:srgbClr val="FFFFFF"/>
         </a:solidFill>
+        <a:effectLst/>
       </p:bgPr>
     </p:bg>
     <p:spTree>
@@ -6655,30 +6280,6 @@
           <a:chExt cx="0" cy="0"/>
         </a:xfrm>
       </p:grpSpPr>
-      <p:pic>
-        <p:nvPicPr>
-          <p:cNvPr id="2" name="Image 0" descr="assets/logo_navy.png">    </p:cNvPr>
-          <p:cNvPicPr>
-            <a:picLocks noChangeAspect="1"/>
-          </p:cNvPicPr>
-          <p:nvPr/>
-        </p:nvPicPr>
-        <p:blipFill>
-          <a:blip r:embed="rId1"/>
-          <a:stretch>
-            <a:fillRect/>
-          </a:stretch>
-        </p:blipFill>
-        <p:spPr>
-          <a:xfrm>
-            <a:off x="502920" y="310896"/>
-            <a:ext cx="1417320" cy="374904"/>
-          </a:xfrm>
-          <a:prstGeom prst="rect">
-            <a:avLst/>
-          </a:prstGeom>
-        </p:spPr>
-      </p:pic>
       <p:sp>
         <p:nvSpPr>
           <p:cNvPr id="3" name="Text 0"/>
@@ -6700,11 +6301,11 @@
           <a:bodyPr wrap="square" lIns="0" tIns="0" rIns="0" bIns="0" rtlCol="0" anchor="ctr"/>
           <a:lstStyle/>
           <a:p>
-            <a:pPr indent="0" marL="0">
-              <a:buNone/>
-            </a:pPr>
-            <a:r>
-              <a:rPr lang="en-US" sz="1200" b="1" spc="200" kern="0" dirty="0">
+            <a:pPr marL="0" indent="0">
+              <a:buNone/>
+            </a:pPr>
+            <a:r>
+              <a:rPr lang="en-US" sz="1200" b="1" kern="0" spc="200" dirty="0">
                 <a:solidFill>
                   <a:srgbClr val="13B9AB"/>
                 </a:solidFill>
@@ -6739,7 +6340,7 @@
           <a:bodyPr wrap="square" lIns="0" tIns="0" rIns="0" bIns="0" rtlCol="0" anchor="ctr"/>
           <a:lstStyle/>
           <a:p>
-            <a:pPr indent="0" marL="0">
+            <a:pPr marL="0" indent="0">
               <a:buNone/>
             </a:pPr>
             <a:r>
@@ -6776,6 +6377,13 @@
           </a:solidFill>
           <a:ln/>
         </p:spPr>
+        <p:txBody>
+          <a:bodyPr/>
+          <a:lstStyle/>
+          <a:p>
+            <a:endParaRPr lang="es-ES"/>
+          </a:p>
+        </p:txBody>
       </p:sp>
       <p:sp>
         <p:nvSpPr>
@@ -6798,7 +6406,7 @@
           <a:bodyPr wrap="square" lIns="0" tIns="0" rIns="0" bIns="0" rtlCol="0" anchor="ctr"/>
           <a:lstStyle/>
           <a:p>
-            <a:pPr indent="0" marL="0">
+            <a:pPr marL="0" indent="0">
               <a:buNone/>
             </a:pPr>
             <a:r>
@@ -6837,7 +6445,7 @@
           <a:bodyPr wrap="square" lIns="0" tIns="0" rIns="0" bIns="0" rtlCol="0" anchor="ctr"/>
           <a:lstStyle/>
           <a:p>
-            <a:pPr indent="0" marL="0">
+            <a:pPr marL="0" indent="0">
               <a:lnSpc>
                 <a:spcPct val="105000"/>
               </a:lnSpc>
@@ -6877,6 +6485,13 @@
           </a:solidFill>
           <a:ln/>
         </p:spPr>
+        <p:txBody>
+          <a:bodyPr/>
+          <a:lstStyle/>
+          <a:p>
+            <a:endParaRPr lang="es-ES"/>
+          </a:p>
+        </p:txBody>
       </p:sp>
       <p:sp>
         <p:nvSpPr>
@@ -6899,7 +6514,7 @@
           <a:bodyPr wrap="square" lIns="0" tIns="0" rIns="0" bIns="0" rtlCol="0" anchor="ctr"/>
           <a:lstStyle/>
           <a:p>
-            <a:pPr indent="0" marL="0">
+            <a:pPr marL="0" indent="0">
               <a:buNone/>
             </a:pPr>
             <a:r>
@@ -6938,7 +6553,7 @@
           <a:bodyPr wrap="square" lIns="0" tIns="0" rIns="0" bIns="0" rtlCol="0" anchor="ctr"/>
           <a:lstStyle/>
           <a:p>
-            <a:pPr indent="0" marL="0">
+            <a:pPr marL="0" indent="0">
               <a:lnSpc>
                 <a:spcPct val="105000"/>
               </a:lnSpc>
@@ -6978,6 +6593,13 @@
           </a:solidFill>
           <a:ln/>
         </p:spPr>
+        <p:txBody>
+          <a:bodyPr/>
+          <a:lstStyle/>
+          <a:p>
+            <a:endParaRPr lang="es-ES"/>
+          </a:p>
+        </p:txBody>
       </p:sp>
       <p:sp>
         <p:nvSpPr>
@@ -7000,7 +6622,7 @@
           <a:bodyPr wrap="square" lIns="0" tIns="0" rIns="0" bIns="0" rtlCol="0" anchor="ctr"/>
           <a:lstStyle/>
           <a:p>
-            <a:pPr indent="0" marL="0">
+            <a:pPr marL="0" indent="0">
               <a:buNone/>
             </a:pPr>
             <a:r>
@@ -7039,7 +6661,7 @@
           <a:bodyPr wrap="square" lIns="0" tIns="0" rIns="0" bIns="0" rtlCol="0" anchor="ctr"/>
           <a:lstStyle/>
           <a:p>
-            <a:pPr indent="0" marL="0">
+            <a:pPr marL="0" indent="0">
               <a:lnSpc>
                 <a:spcPct val="105000"/>
               </a:lnSpc>
@@ -7079,6 +6701,13 @@
           </a:solidFill>
           <a:ln/>
         </p:spPr>
+        <p:txBody>
+          <a:bodyPr/>
+          <a:lstStyle/>
+          <a:p>
+            <a:endParaRPr lang="es-ES"/>
+          </a:p>
+        </p:txBody>
       </p:sp>
       <p:sp>
         <p:nvSpPr>
@@ -7101,7 +6730,7 @@
           <a:bodyPr wrap="square" lIns="0" tIns="0" rIns="0" bIns="0" rtlCol="0" anchor="ctr"/>
           <a:lstStyle/>
           <a:p>
-            <a:pPr indent="0" marL="0">
+            <a:pPr marL="0" indent="0">
               <a:buNone/>
             </a:pPr>
             <a:r>
@@ -7140,7 +6769,7 @@
           <a:bodyPr wrap="square" lIns="0" tIns="0" rIns="0" bIns="0" rtlCol="0" anchor="ctr"/>
           <a:lstStyle/>
           <a:p>
-            <a:pPr indent="0" marL="0">
+            <a:pPr marL="0" indent="0">
               <a:lnSpc>
                 <a:spcPct val="105000"/>
               </a:lnSpc>
@@ -7182,25 +6811,32 @@
           </a:solidFill>
           <a:ln/>
           <a:effectLst>
-            <a:outerShdw sx="100000" sy="100000" kx="0" ky="0" algn="bl" rotWithShape="0" blurRad="114300" dist="38100" dir="5400000">
+            <a:outerShdw blurRad="114300" dist="38100" dir="5400000" algn="bl" rotWithShape="0">
               <a:srgbClr val="000000">
                 <a:alpha val="16000"/>
               </a:srgbClr>
             </a:outerShdw>
           </a:effectLst>
         </p:spPr>
+        <p:txBody>
+          <a:bodyPr/>
+          <a:lstStyle/>
+          <a:p>
+            <a:endParaRPr lang="es-ES"/>
+          </a:p>
+        </p:txBody>
       </p:sp>
       <p:pic>
         <p:nvPicPr>
-          <p:cNvPr id="18" name="Image 1" descr="assets/fig_feature_importance.png">    </p:cNvPr>
+          <p:cNvPr id="18" name="Image 1" descr="assets/fig_feature_importance.png"/>
           <p:cNvPicPr>
             <a:picLocks noChangeAspect="1"/>
           </p:cNvPicPr>
           <p:nvPr/>
         </p:nvPicPr>
         <p:blipFill>
-          <a:blip r:embed="rId2"/>
-          <a:srcRect l="0" r="0" t="0" b="0"/>
+          <a:blip r:embed="rId3"/>
+          <a:srcRect/>
           <a:stretch/>
         </p:blipFill>
         <p:spPr>
@@ -7234,7 +6870,7 @@
           <a:bodyPr wrap="square" lIns="0" tIns="0" rIns="0" bIns="0" rtlCol="0" anchor="ctr"/>
           <a:lstStyle/>
           <a:p>
-            <a:pPr algn="ctr" indent="0" marL="0">
+            <a:pPr marL="0" indent="0" algn="ctr">
               <a:buNone/>
             </a:pPr>
             <a:r>
@@ -7273,7 +6909,7 @@
           <a:bodyPr wrap="square" rtlCol="0" anchor="ctr"/>
           <a:lstStyle/>
           <a:p>
-            <a:pPr algn="l" indent="0" marL="0">
+            <a:pPr marL="0" indent="0" algn="l">
               <a:buNone/>
             </a:pPr>
             <a:r>
@@ -7312,7 +6948,7 @@
           <a:bodyPr wrap="square" rtlCol="0" anchor="ctr"/>
           <a:lstStyle/>
           <a:p>
-            <a:pPr algn="r" indent="0" marL="0">
+            <a:pPr marL="0" indent="0" algn="r">
               <a:buNone/>
             </a:pPr>
             <a:r>
@@ -7346,6 +6982,7 @@
         <a:solidFill>
           <a:srgbClr val="FFFFFF"/>
         </a:solidFill>
+        <a:effectLst/>
       </p:bgPr>
     </p:bg>
     <p:spTree>
@@ -7362,30 +6999,6 @@
           <a:chExt cx="0" cy="0"/>
         </a:xfrm>
       </p:grpSpPr>
-      <p:pic>
-        <p:nvPicPr>
-          <p:cNvPr id="2" name="Image 0" descr="assets/logo_navy.png">    </p:cNvPr>
-          <p:cNvPicPr>
-            <a:picLocks noChangeAspect="1"/>
-          </p:cNvPicPr>
-          <p:nvPr/>
-        </p:nvPicPr>
-        <p:blipFill>
-          <a:blip r:embed="rId1"/>
-          <a:stretch>
-            <a:fillRect/>
-          </a:stretch>
-        </p:blipFill>
-        <p:spPr>
-          <a:xfrm>
-            <a:off x="502920" y="310896"/>
-            <a:ext cx="1417320" cy="374904"/>
-          </a:xfrm>
-          <a:prstGeom prst="rect">
-            <a:avLst/>
-          </a:prstGeom>
-        </p:spPr>
-      </p:pic>
       <p:sp>
         <p:nvSpPr>
           <p:cNvPr id="3" name="Text 0"/>
@@ -7407,11 +7020,11 @@
           <a:bodyPr wrap="square" lIns="0" tIns="0" rIns="0" bIns="0" rtlCol="0" anchor="ctr"/>
           <a:lstStyle/>
           <a:p>
-            <a:pPr indent="0" marL="0">
-              <a:buNone/>
-            </a:pPr>
-            <a:r>
-              <a:rPr lang="en-US" sz="1200" b="1" spc="200" kern="0" dirty="0">
+            <a:pPr marL="0" indent="0">
+              <a:buNone/>
+            </a:pPr>
+            <a:r>
+              <a:rPr lang="en-US" sz="1200" b="1" kern="0" spc="200" dirty="0">
                 <a:solidFill>
                   <a:srgbClr val="13B9AB"/>
                 </a:solidFill>
@@ -7446,7 +7059,7 @@
           <a:bodyPr wrap="square" lIns="0" tIns="0" rIns="0" bIns="0" rtlCol="0" anchor="ctr"/>
           <a:lstStyle/>
           <a:p>
-            <a:pPr indent="0" marL="0">
+            <a:pPr marL="0" indent="0">
               <a:buNone/>
             </a:pPr>
             <a:r>
@@ -7485,13 +7098,20 @@
           </a:solidFill>
           <a:ln/>
           <a:effectLst>
-            <a:outerShdw sx="100000" sy="100000" kx="0" ky="0" algn="bl" rotWithShape="0" blurRad="114300" dist="38100" dir="5400000">
+            <a:outerShdw blurRad="114300" dist="38100" dir="5400000" algn="bl" rotWithShape="0">
               <a:srgbClr val="000000">
                 <a:alpha val="16000"/>
               </a:srgbClr>
             </a:outerShdw>
           </a:effectLst>
         </p:spPr>
+        <p:txBody>
+          <a:bodyPr/>
+          <a:lstStyle/>
+          <a:p>
+            <a:endParaRPr lang="es-ES"/>
+          </a:p>
+        </p:txBody>
       </p:sp>
       <p:sp>
         <p:nvSpPr>
@@ -7514,7 +7134,7 @@
           <a:bodyPr wrap="square" lIns="0" tIns="0" rIns="0" bIns="0" rtlCol="0" anchor="ctr"/>
           <a:lstStyle/>
           <a:p>
-            <a:pPr indent="0" marL="0">
+            <a:pPr marL="0" indent="0">
               <a:buNone/>
             </a:pPr>
             <a:r>
@@ -7553,7 +7173,7 @@
           <a:bodyPr wrap="square" lIns="0" tIns="0" rIns="0" bIns="0" rtlCol="0" anchor="ctr"/>
           <a:lstStyle/>
           <a:p>
-            <a:pPr indent="0" marL="0">
+            <a:pPr marL="0" indent="0">
               <a:lnSpc>
                 <a:spcPct val="100000"/>
               </a:lnSpc>
@@ -7595,7 +7215,7 @@
           <a:bodyPr wrap="square" lIns="0" tIns="0" rIns="0" bIns="0" rtlCol="0" anchor="ctr"/>
           <a:lstStyle/>
           <a:p>
-            <a:pPr indent="0" marL="0">
+            <a:pPr marL="0" indent="0">
               <a:lnSpc>
                 <a:spcPct val="100000"/>
               </a:lnSpc>
@@ -7612,12 +7232,6 @@
               </a:rPr>
               <a:t>✓  </a:t>
             </a:r>
-            <a:pPr indent="0" marL="0">
-              <a:lnSpc>
-                <a:spcPct val="100000"/>
-              </a:lnSpc>
-              <a:buNone/>
-            </a:pPr>
             <a:r>
               <a:rPr lang="en-US" sz="1300" dirty="0">
                 <a:solidFill>
@@ -7654,13 +7268,20 @@
           </a:solidFill>
           <a:ln/>
           <a:effectLst>
-            <a:outerShdw sx="100000" sy="100000" kx="0" ky="0" algn="bl" rotWithShape="0" blurRad="114300" dist="38100" dir="5400000">
+            <a:outerShdw blurRad="114300" dist="38100" dir="5400000" algn="bl" rotWithShape="0">
               <a:srgbClr val="000000">
                 <a:alpha val="16000"/>
               </a:srgbClr>
             </a:outerShdw>
           </a:effectLst>
         </p:spPr>
+        <p:txBody>
+          <a:bodyPr/>
+          <a:lstStyle/>
+          <a:p>
+            <a:endParaRPr lang="es-ES"/>
+          </a:p>
+        </p:txBody>
       </p:sp>
       <p:sp>
         <p:nvSpPr>
@@ -7683,7 +7304,7 @@
           <a:bodyPr wrap="square" lIns="0" tIns="0" rIns="0" bIns="0" rtlCol="0" anchor="ctr"/>
           <a:lstStyle/>
           <a:p>
-            <a:pPr indent="0" marL="0">
+            <a:pPr marL="0" indent="0">
               <a:buNone/>
             </a:pPr>
             <a:r>
@@ -7722,7 +7343,7 @@
           <a:bodyPr wrap="square" lIns="0" tIns="0" rIns="0" bIns="0" rtlCol="0" anchor="ctr"/>
           <a:lstStyle/>
           <a:p>
-            <a:pPr indent="0" marL="0">
+            <a:pPr marL="0" indent="0">
               <a:lnSpc>
                 <a:spcPct val="100000"/>
               </a:lnSpc>
@@ -7764,7 +7385,7 @@
           <a:bodyPr wrap="square" lIns="0" tIns="0" rIns="0" bIns="0" rtlCol="0" anchor="ctr"/>
           <a:lstStyle/>
           <a:p>
-            <a:pPr indent="0" marL="0">
+            <a:pPr marL="0" indent="0">
               <a:lnSpc>
                 <a:spcPct val="100000"/>
               </a:lnSpc>
@@ -7781,12 +7402,6 @@
               </a:rPr>
               <a:t>✓  </a:t>
             </a:r>
-            <a:pPr indent="0" marL="0">
-              <a:lnSpc>
-                <a:spcPct val="100000"/>
-              </a:lnSpc>
-              <a:buNone/>
-            </a:pPr>
             <a:r>
               <a:rPr lang="en-US" sz="1300" dirty="0">
                 <a:solidFill>
@@ -7823,13 +7438,20 @@
           </a:solidFill>
           <a:ln/>
           <a:effectLst>
-            <a:outerShdw sx="100000" sy="100000" kx="0" ky="0" algn="bl" rotWithShape="0" blurRad="114300" dist="38100" dir="5400000">
+            <a:outerShdw blurRad="114300" dist="38100" dir="5400000" algn="bl" rotWithShape="0">
               <a:srgbClr val="000000">
                 <a:alpha val="16000"/>
               </a:srgbClr>
             </a:outerShdw>
           </a:effectLst>
         </p:spPr>
+        <p:txBody>
+          <a:bodyPr/>
+          <a:lstStyle/>
+          <a:p>
+            <a:endParaRPr lang="es-ES"/>
+          </a:p>
+        </p:txBody>
       </p:sp>
       <p:sp>
         <p:nvSpPr>
@@ -7852,7 +7474,7 @@
           <a:bodyPr wrap="square" lIns="0" tIns="0" rIns="0" bIns="0" rtlCol="0" anchor="ctr"/>
           <a:lstStyle/>
           <a:p>
-            <a:pPr indent="0" marL="0">
+            <a:pPr marL="0" indent="0">
               <a:buNone/>
             </a:pPr>
             <a:r>
@@ -7891,7 +7513,7 @@
           <a:bodyPr wrap="square" lIns="0" tIns="0" rIns="0" bIns="0" rtlCol="0" anchor="ctr"/>
           <a:lstStyle/>
           <a:p>
-            <a:pPr indent="0" marL="0">
+            <a:pPr marL="0" indent="0">
               <a:lnSpc>
                 <a:spcPct val="100000"/>
               </a:lnSpc>
@@ -7933,7 +7555,7 @@
           <a:bodyPr wrap="square" lIns="0" tIns="0" rIns="0" bIns="0" rtlCol="0" anchor="ctr"/>
           <a:lstStyle/>
           <a:p>
-            <a:pPr indent="0" marL="0">
+            <a:pPr marL="0" indent="0">
               <a:lnSpc>
                 <a:spcPct val="100000"/>
               </a:lnSpc>
@@ -7950,12 +7572,6 @@
               </a:rPr>
               <a:t>✓  </a:t>
             </a:r>
-            <a:pPr indent="0" marL="0">
-              <a:lnSpc>
-                <a:spcPct val="100000"/>
-              </a:lnSpc>
-              <a:buNone/>
-            </a:pPr>
             <a:r>
               <a:rPr lang="en-US" sz="1300" dirty="0">
                 <a:solidFill>
@@ -7992,13 +7608,20 @@
           </a:solidFill>
           <a:ln/>
           <a:effectLst>
-            <a:outerShdw sx="100000" sy="100000" kx="0" ky="0" algn="bl" rotWithShape="0" blurRad="114300" dist="38100" dir="5400000">
+            <a:outerShdw blurRad="114300" dist="38100" dir="5400000" algn="bl" rotWithShape="0">
               <a:srgbClr val="000000">
                 <a:alpha val="16000"/>
               </a:srgbClr>
             </a:outerShdw>
           </a:effectLst>
         </p:spPr>
+        <p:txBody>
+          <a:bodyPr/>
+          <a:lstStyle/>
+          <a:p>
+            <a:endParaRPr lang="es-ES"/>
+          </a:p>
+        </p:txBody>
       </p:sp>
       <p:sp>
         <p:nvSpPr>
@@ -8021,7 +7644,7 @@
           <a:bodyPr wrap="square" lIns="0" tIns="0" rIns="0" bIns="0" rtlCol="0" anchor="ctr"/>
           <a:lstStyle/>
           <a:p>
-            <a:pPr indent="0" marL="0">
+            <a:pPr marL="0" indent="0">
               <a:buNone/>
             </a:pPr>
             <a:r>
@@ -8060,7 +7683,7 @@
           <a:bodyPr wrap="square" lIns="0" tIns="0" rIns="0" bIns="0" rtlCol="0" anchor="ctr"/>
           <a:lstStyle/>
           <a:p>
-            <a:pPr indent="0" marL="0">
+            <a:pPr marL="0" indent="0">
               <a:lnSpc>
                 <a:spcPct val="100000"/>
               </a:lnSpc>
@@ -8102,7 +7725,7 @@
           <a:bodyPr wrap="square" lIns="0" tIns="0" rIns="0" bIns="0" rtlCol="0" anchor="ctr"/>
           <a:lstStyle/>
           <a:p>
-            <a:pPr indent="0" marL="0">
+            <a:pPr marL="0" indent="0">
               <a:lnSpc>
                 <a:spcPct val="100000"/>
               </a:lnSpc>
@@ -8119,12 +7742,6 @@
               </a:rPr>
               <a:t>✓  </a:t>
             </a:r>
-            <a:pPr indent="0" marL="0">
-              <a:lnSpc>
-                <a:spcPct val="100000"/>
-              </a:lnSpc>
-              <a:buNone/>
-            </a:pPr>
             <a:r>
               <a:rPr lang="en-US" sz="1300" dirty="0">
                 <a:solidFill>
@@ -8161,7 +7778,7 @@
           <a:bodyPr wrap="square" rtlCol="0" anchor="ctr"/>
           <a:lstStyle/>
           <a:p>
-            <a:pPr algn="l" indent="0" marL="0">
+            <a:pPr marL="0" indent="0" algn="l">
               <a:buNone/>
             </a:pPr>
             <a:r>
@@ -8200,7 +7817,7 @@
           <a:bodyPr wrap="square" rtlCol="0" anchor="ctr"/>
           <a:lstStyle/>
           <a:p>
-            <a:pPr algn="r" indent="0" marL="0">
+            <a:pPr marL="0" indent="0" algn="r">
               <a:buNone/>
             </a:pPr>
             <a:r>
@@ -8234,6 +7851,7 @@
         <a:solidFill>
           <a:srgbClr val="FFFFFF"/>
         </a:solidFill>
+        <a:effectLst/>
       </p:bgPr>
     </p:bg>
     <p:spTree>
@@ -8250,30 +7868,6 @@
           <a:chExt cx="0" cy="0"/>
         </a:xfrm>
       </p:grpSpPr>
-      <p:pic>
-        <p:nvPicPr>
-          <p:cNvPr id="2" name="Image 0" descr="assets/logo_navy.png">    </p:cNvPr>
-          <p:cNvPicPr>
-            <a:picLocks noChangeAspect="1"/>
-          </p:cNvPicPr>
-          <p:nvPr/>
-        </p:nvPicPr>
-        <p:blipFill>
-          <a:blip r:embed="rId1"/>
-          <a:stretch>
-            <a:fillRect/>
-          </a:stretch>
-        </p:blipFill>
-        <p:spPr>
-          <a:xfrm>
-            <a:off x="502920" y="310896"/>
-            <a:ext cx="1417320" cy="374904"/>
-          </a:xfrm>
-          <a:prstGeom prst="rect">
-            <a:avLst/>
-          </a:prstGeom>
-        </p:spPr>
-      </p:pic>
       <p:sp>
         <p:nvSpPr>
           <p:cNvPr id="3" name="Text 0"/>
@@ -8295,11 +7889,11 @@
           <a:bodyPr wrap="square" lIns="0" tIns="0" rIns="0" bIns="0" rtlCol="0" anchor="ctr"/>
           <a:lstStyle/>
           <a:p>
-            <a:pPr indent="0" marL="0">
-              <a:buNone/>
-            </a:pPr>
-            <a:r>
-              <a:rPr lang="en-US" sz="1200" b="1" spc="200" kern="0" dirty="0">
+            <a:pPr marL="0" indent="0">
+              <a:buNone/>
+            </a:pPr>
+            <a:r>
+              <a:rPr lang="en-US" sz="1200" b="1" kern="0" spc="200" dirty="0">
                 <a:solidFill>
                   <a:srgbClr val="13B9AB"/>
                 </a:solidFill>
@@ -8334,7 +7928,7 @@
           <a:bodyPr wrap="square" lIns="0" tIns="0" rIns="0" bIns="0" rtlCol="0" anchor="ctr"/>
           <a:lstStyle/>
           <a:p>
-            <a:pPr indent="0" marL="0">
+            <a:pPr marL="0" indent="0">
               <a:buNone/>
             </a:pPr>
             <a:r>
@@ -8373,13 +7967,20 @@
           </a:solidFill>
           <a:ln/>
           <a:effectLst>
-            <a:outerShdw sx="100000" sy="100000" kx="0" ky="0" algn="bl" rotWithShape="0" blurRad="114300" dist="38100" dir="5400000">
+            <a:outerShdw blurRad="114300" dist="38100" dir="5400000" algn="bl" rotWithShape="0">
               <a:srgbClr val="000000">
                 <a:alpha val="16000"/>
               </a:srgbClr>
             </a:outerShdw>
           </a:effectLst>
         </p:spPr>
+        <p:txBody>
+          <a:bodyPr/>
+          <a:lstStyle/>
+          <a:p>
+            <a:endParaRPr lang="es-ES"/>
+          </a:p>
+        </p:txBody>
       </p:sp>
       <p:sp>
         <p:nvSpPr>
@@ -8402,6 +8003,13 @@
           </a:solidFill>
           <a:ln/>
         </p:spPr>
+        <p:txBody>
+          <a:bodyPr/>
+          <a:lstStyle/>
+          <a:p>
+            <a:endParaRPr lang="es-ES"/>
+          </a:p>
+        </p:txBody>
       </p:sp>
       <p:sp>
         <p:nvSpPr>
@@ -8424,7 +8032,7 @@
           <a:bodyPr wrap="square" lIns="0" tIns="0" rIns="0" bIns="0" rtlCol="0" anchor="ctr"/>
           <a:lstStyle/>
           <a:p>
-            <a:pPr algn="ctr" indent="0" marL="0">
+            <a:pPr marL="0" indent="0" algn="ctr">
               <a:buNone/>
             </a:pPr>
             <a:r>
@@ -8463,7 +8071,7 @@
           <a:bodyPr wrap="square" lIns="0" tIns="0" rIns="0" bIns="0" rtlCol="0" anchor="ctr"/>
           <a:lstStyle/>
           <a:p>
-            <a:pPr indent="0" marL="0">
+            <a:pPr marL="0" indent="0">
               <a:buNone/>
             </a:pPr>
             <a:r>
@@ -8502,7 +8110,7 @@
           <a:bodyPr wrap="square" lIns="0" tIns="0" rIns="0" bIns="0" rtlCol="0" anchor="ctr"/>
           <a:lstStyle/>
           <a:p>
-            <a:pPr indent="0" marL="0">
+            <a:pPr marL="0" indent="0">
               <a:lnSpc>
                 <a:spcPct val="105000"/>
               </a:lnSpc>
@@ -8544,13 +8152,20 @@
           </a:solidFill>
           <a:ln/>
           <a:effectLst>
-            <a:outerShdw sx="100000" sy="100000" kx="0" ky="0" algn="bl" rotWithShape="0" blurRad="114300" dist="38100" dir="5400000">
+            <a:outerShdw blurRad="114300" dist="38100" dir="5400000" algn="bl" rotWithShape="0">
               <a:srgbClr val="000000">
                 <a:alpha val="16000"/>
               </a:srgbClr>
             </a:outerShdw>
           </a:effectLst>
         </p:spPr>
+        <p:txBody>
+          <a:bodyPr/>
+          <a:lstStyle/>
+          <a:p>
+            <a:endParaRPr lang="es-ES"/>
+          </a:p>
+        </p:txBody>
       </p:sp>
       <p:sp>
         <p:nvSpPr>
@@ -8573,6 +8188,13 @@
           </a:solidFill>
           <a:ln/>
         </p:spPr>
+        <p:txBody>
+          <a:bodyPr/>
+          <a:lstStyle/>
+          <a:p>
+            <a:endParaRPr lang="es-ES"/>
+          </a:p>
+        </p:txBody>
       </p:sp>
       <p:sp>
         <p:nvSpPr>
@@ -8595,7 +8217,7 @@
           <a:bodyPr wrap="square" lIns="0" tIns="0" rIns="0" bIns="0" rtlCol="0" anchor="ctr"/>
           <a:lstStyle/>
           <a:p>
-            <a:pPr algn="ctr" indent="0" marL="0">
+            <a:pPr marL="0" indent="0" algn="ctr">
               <a:buNone/>
             </a:pPr>
             <a:r>
@@ -8634,7 +8256,7 @@
           <a:bodyPr wrap="square" lIns="0" tIns="0" rIns="0" bIns="0" rtlCol="0" anchor="ctr"/>
           <a:lstStyle/>
           <a:p>
-            <a:pPr indent="0" marL="0">
+            <a:pPr marL="0" indent="0">
               <a:buNone/>
             </a:pPr>
             <a:r>
@@ -8673,7 +8295,7 @@
           <a:bodyPr wrap="square" lIns="0" tIns="0" rIns="0" bIns="0" rtlCol="0" anchor="ctr"/>
           <a:lstStyle/>
           <a:p>
-            <a:pPr indent="0" marL="0">
+            <a:pPr marL="0" indent="0">
               <a:lnSpc>
                 <a:spcPct val="105000"/>
               </a:lnSpc>
@@ -8715,13 +8337,20 @@
           </a:solidFill>
           <a:ln/>
           <a:effectLst>
-            <a:outerShdw sx="100000" sy="100000" kx="0" ky="0" algn="bl" rotWithShape="0" blurRad="114300" dist="38100" dir="5400000">
+            <a:outerShdw blurRad="114300" dist="38100" dir="5400000" algn="bl" rotWithShape="0">
               <a:srgbClr val="000000">
                 <a:alpha val="16000"/>
               </a:srgbClr>
             </a:outerShdw>
           </a:effectLst>
         </p:spPr>
+        <p:txBody>
+          <a:bodyPr/>
+          <a:lstStyle/>
+          <a:p>
+            <a:endParaRPr lang="es-ES"/>
+          </a:p>
+        </p:txBody>
       </p:sp>
       <p:sp>
         <p:nvSpPr>
@@ -8744,6 +8373,13 @@
           </a:solidFill>
           <a:ln/>
         </p:spPr>
+        <p:txBody>
+          <a:bodyPr/>
+          <a:lstStyle/>
+          <a:p>
+            <a:endParaRPr lang="es-ES"/>
+          </a:p>
+        </p:txBody>
       </p:sp>
       <p:sp>
         <p:nvSpPr>
@@ -8766,7 +8402,7 @@
           <a:bodyPr wrap="square" lIns="0" tIns="0" rIns="0" bIns="0" rtlCol="0" anchor="ctr"/>
           <a:lstStyle/>
           <a:p>
-            <a:pPr algn="ctr" indent="0" marL="0">
+            <a:pPr marL="0" indent="0" algn="ctr">
               <a:buNone/>
             </a:pPr>
             <a:r>
@@ -8805,7 +8441,7 @@
           <a:bodyPr wrap="square" lIns="0" tIns="0" rIns="0" bIns="0" rtlCol="0" anchor="ctr"/>
           <a:lstStyle/>
           <a:p>
-            <a:pPr indent="0" marL="0">
+            <a:pPr marL="0" indent="0">
               <a:buNone/>
             </a:pPr>
             <a:r>
@@ -8844,7 +8480,7 @@
           <a:bodyPr wrap="square" lIns="0" tIns="0" rIns="0" bIns="0" rtlCol="0" anchor="ctr"/>
           <a:lstStyle/>
           <a:p>
-            <a:pPr indent="0" marL="0">
+            <a:pPr marL="0" indent="0">
               <a:lnSpc>
                 <a:spcPct val="105000"/>
               </a:lnSpc>
@@ -8886,13 +8522,20 @@
           </a:solidFill>
           <a:ln/>
           <a:effectLst>
-            <a:outerShdw sx="100000" sy="100000" kx="0" ky="0" algn="bl" rotWithShape="0" blurRad="114300" dist="38100" dir="5400000">
+            <a:outerShdw blurRad="114300" dist="38100" dir="5400000" algn="bl" rotWithShape="0">
               <a:srgbClr val="000000">
                 <a:alpha val="16000"/>
               </a:srgbClr>
             </a:outerShdw>
           </a:effectLst>
         </p:spPr>
+        <p:txBody>
+          <a:bodyPr/>
+          <a:lstStyle/>
+          <a:p>
+            <a:endParaRPr lang="es-ES"/>
+          </a:p>
+        </p:txBody>
       </p:sp>
       <p:sp>
         <p:nvSpPr>
@@ -8915,6 +8558,13 @@
           </a:solidFill>
           <a:ln/>
         </p:spPr>
+        <p:txBody>
+          <a:bodyPr/>
+          <a:lstStyle/>
+          <a:p>
+            <a:endParaRPr lang="es-ES"/>
+          </a:p>
+        </p:txBody>
       </p:sp>
       <p:sp>
         <p:nvSpPr>
@@ -8937,7 +8587,7 @@
           <a:bodyPr wrap="square" lIns="0" tIns="0" rIns="0" bIns="0" rtlCol="0" anchor="ctr"/>
           <a:lstStyle/>
           <a:p>
-            <a:pPr algn="ctr" indent="0" marL="0">
+            <a:pPr marL="0" indent="0" algn="ctr">
               <a:buNone/>
             </a:pPr>
             <a:r>
@@ -8976,7 +8626,7 @@
           <a:bodyPr wrap="square" lIns="0" tIns="0" rIns="0" bIns="0" rtlCol="0" anchor="ctr"/>
           <a:lstStyle/>
           <a:p>
-            <a:pPr indent="0" marL="0">
+            <a:pPr marL="0" indent="0">
               <a:buNone/>
             </a:pPr>
             <a:r>
@@ -9015,7 +8665,7 @@
           <a:bodyPr wrap="square" lIns="0" tIns="0" rIns="0" bIns="0" rtlCol="0" anchor="ctr"/>
           <a:lstStyle/>
           <a:p>
-            <a:pPr indent="0" marL="0">
+            <a:pPr marL="0" indent="0">
               <a:lnSpc>
                 <a:spcPct val="105000"/>
               </a:lnSpc>
@@ -9057,13 +8707,20 @@
           </a:solidFill>
           <a:ln/>
           <a:effectLst>
-            <a:outerShdw sx="100000" sy="100000" kx="0" ky="0" algn="bl" rotWithShape="0" blurRad="114300" dist="38100" dir="5400000">
+            <a:outerShdw blurRad="114300" dist="38100" dir="5400000" algn="bl" rotWithShape="0">
               <a:srgbClr val="000000">
                 <a:alpha val="16000"/>
               </a:srgbClr>
             </a:outerShdw>
           </a:effectLst>
         </p:spPr>
+        <p:txBody>
+          <a:bodyPr/>
+          <a:lstStyle/>
+          <a:p>
+            <a:endParaRPr lang="es-ES"/>
+          </a:p>
+        </p:txBody>
       </p:sp>
       <p:sp>
         <p:nvSpPr>
@@ -9086,6 +8743,13 @@
           </a:solidFill>
           <a:ln/>
         </p:spPr>
+        <p:txBody>
+          <a:bodyPr/>
+          <a:lstStyle/>
+          <a:p>
+            <a:endParaRPr lang="es-ES"/>
+          </a:p>
+        </p:txBody>
       </p:sp>
       <p:sp>
         <p:nvSpPr>
@@ -9108,7 +8772,7 @@
           <a:bodyPr wrap="square" lIns="0" tIns="0" rIns="0" bIns="0" rtlCol="0" anchor="ctr"/>
           <a:lstStyle/>
           <a:p>
-            <a:pPr algn="ctr" indent="0" marL="0">
+            <a:pPr marL="0" indent="0" algn="ctr">
               <a:buNone/>
             </a:pPr>
             <a:r>
@@ -9147,7 +8811,7 @@
           <a:bodyPr wrap="square" lIns="0" tIns="0" rIns="0" bIns="0" rtlCol="0" anchor="ctr"/>
           <a:lstStyle/>
           <a:p>
-            <a:pPr indent="0" marL="0">
+            <a:pPr marL="0" indent="0">
               <a:buNone/>
             </a:pPr>
             <a:r>
@@ -9186,7 +8850,7 @@
           <a:bodyPr wrap="square" lIns="0" tIns="0" rIns="0" bIns="0" rtlCol="0" anchor="ctr"/>
           <a:lstStyle/>
           <a:p>
-            <a:pPr indent="0" marL="0">
+            <a:pPr marL="0" indent="0">
               <a:lnSpc>
                 <a:spcPct val="105000"/>
               </a:lnSpc>
@@ -9228,13 +8892,20 @@
           </a:solidFill>
           <a:ln/>
           <a:effectLst>
-            <a:outerShdw sx="100000" sy="100000" kx="0" ky="0" algn="bl" rotWithShape="0" blurRad="114300" dist="38100" dir="5400000">
+            <a:outerShdw blurRad="114300" dist="38100" dir="5400000" algn="bl" rotWithShape="0">
               <a:srgbClr val="000000">
                 <a:alpha val="16000"/>
               </a:srgbClr>
             </a:outerShdw>
           </a:effectLst>
         </p:spPr>
+        <p:txBody>
+          <a:bodyPr/>
+          <a:lstStyle/>
+          <a:p>
+            <a:endParaRPr lang="es-ES"/>
+          </a:p>
+        </p:txBody>
       </p:sp>
       <p:sp>
         <p:nvSpPr>
@@ -9257,6 +8928,13 @@
           </a:solidFill>
           <a:ln/>
         </p:spPr>
+        <p:txBody>
+          <a:bodyPr/>
+          <a:lstStyle/>
+          <a:p>
+            <a:endParaRPr lang="es-ES"/>
+          </a:p>
+        </p:txBody>
       </p:sp>
       <p:sp>
         <p:nvSpPr>
@@ -9279,7 +8957,7 @@
           <a:bodyPr wrap="square" lIns="0" tIns="0" rIns="0" bIns="0" rtlCol="0" anchor="ctr"/>
           <a:lstStyle/>
           <a:p>
-            <a:pPr algn="ctr" indent="0" marL="0">
+            <a:pPr marL="0" indent="0" algn="ctr">
               <a:buNone/>
             </a:pPr>
             <a:r>
@@ -9318,7 +8996,7 @@
           <a:bodyPr wrap="square" lIns="0" tIns="0" rIns="0" bIns="0" rtlCol="0" anchor="ctr"/>
           <a:lstStyle/>
           <a:p>
-            <a:pPr indent="0" marL="0">
+            <a:pPr marL="0" indent="0">
               <a:buNone/>
             </a:pPr>
             <a:r>
@@ -9357,7 +9035,7 @@
           <a:bodyPr wrap="square" lIns="0" tIns="0" rIns="0" bIns="0" rtlCol="0" anchor="ctr"/>
           <a:lstStyle/>
           <a:p>
-            <a:pPr indent="0" marL="0">
+            <a:pPr marL="0" indent="0">
               <a:lnSpc>
                 <a:spcPct val="105000"/>
               </a:lnSpc>
@@ -9399,7 +9077,7 @@
           <a:bodyPr wrap="square" lIns="0" tIns="0" rIns="0" bIns="0" rtlCol="0" anchor="ctr"/>
           <a:lstStyle/>
           <a:p>
-            <a:pPr indent="0" marL="0">
+            <a:pPr marL="0" indent="0">
               <a:buNone/>
             </a:pPr>
             <a:r>
@@ -9438,7 +9116,7 @@
           <a:bodyPr wrap="square" rtlCol="0" anchor="ctr"/>
           <a:lstStyle/>
           <a:p>
-            <a:pPr algn="l" indent="0" marL="0">
+            <a:pPr marL="0" indent="0" algn="l">
               <a:buNone/>
             </a:pPr>
             <a:r>
@@ -9477,7 +9155,7 @@
           <a:bodyPr wrap="square" rtlCol="0" anchor="ctr"/>
           <a:lstStyle/>
           <a:p>
-            <a:pPr algn="r" indent="0" marL="0">
+            <a:pPr marL="0" indent="0" algn="r">
               <a:buNone/>
             </a:pPr>
             <a:r>
@@ -9511,6 +9189,7 @@
         <a:solidFill>
           <a:srgbClr val="FFFFFF"/>
         </a:solidFill>
+        <a:effectLst/>
       </p:bgPr>
     </p:bg>
     <p:spTree>
@@ -9527,30 +9206,6 @@
           <a:chExt cx="0" cy="0"/>
         </a:xfrm>
       </p:grpSpPr>
-      <p:pic>
-        <p:nvPicPr>
-          <p:cNvPr id="2" name="Image 0" descr="assets/logo_navy.png">    </p:cNvPr>
-          <p:cNvPicPr>
-            <a:picLocks noChangeAspect="1"/>
-          </p:cNvPicPr>
-          <p:nvPr/>
-        </p:nvPicPr>
-        <p:blipFill>
-          <a:blip r:embed="rId1"/>
-          <a:stretch>
-            <a:fillRect/>
-          </a:stretch>
-        </p:blipFill>
-        <p:spPr>
-          <a:xfrm>
-            <a:off x="502920" y="310896"/>
-            <a:ext cx="1417320" cy="374904"/>
-          </a:xfrm>
-          <a:prstGeom prst="rect">
-            <a:avLst/>
-          </a:prstGeom>
-        </p:spPr>
-      </p:pic>
       <p:sp>
         <p:nvSpPr>
           <p:cNvPr id="3" name="Text 0"/>
@@ -9572,11 +9227,11 @@
           <a:bodyPr wrap="square" lIns="0" tIns="0" rIns="0" bIns="0" rtlCol="0" anchor="ctr"/>
           <a:lstStyle/>
           <a:p>
-            <a:pPr indent="0" marL="0">
-              <a:buNone/>
-            </a:pPr>
-            <a:r>
-              <a:rPr lang="en-US" sz="1200" b="1" spc="200" kern="0" dirty="0">
+            <a:pPr marL="0" indent="0">
+              <a:buNone/>
+            </a:pPr>
+            <a:r>
+              <a:rPr lang="en-US" sz="1200" b="1" kern="0" spc="200" dirty="0">
                 <a:solidFill>
                   <a:srgbClr val="13B9AB"/>
                 </a:solidFill>
@@ -9611,7 +9266,7 @@
           <a:bodyPr wrap="square" lIns="0" tIns="0" rIns="0" bIns="0" rtlCol="0" anchor="ctr"/>
           <a:lstStyle/>
           <a:p>
-            <a:pPr indent="0" marL="0">
+            <a:pPr marL="0" indent="0">
               <a:buNone/>
             </a:pPr>
             <a:r>
@@ -9650,7 +9305,7 @@
           <a:bodyPr wrap="square" lIns="0" tIns="0" rIns="0" bIns="0" rtlCol="0" anchor="ctr"/>
           <a:lstStyle/>
           <a:p>
-            <a:pPr indent="0" marL="0">
+            <a:pPr marL="0" indent="0">
               <a:buNone/>
             </a:pPr>
             <a:r>
@@ -9689,13 +9344,20 @@
           </a:solidFill>
           <a:ln/>
           <a:effectLst>
-            <a:outerShdw sx="100000" sy="100000" kx="0" ky="0" algn="bl" rotWithShape="0" blurRad="114300" dist="38100" dir="5400000">
+            <a:outerShdw blurRad="114300" dist="38100" dir="5400000" algn="bl" rotWithShape="0">
               <a:srgbClr val="000000">
                 <a:alpha val="16000"/>
               </a:srgbClr>
             </a:outerShdw>
           </a:effectLst>
         </p:spPr>
+        <p:txBody>
+          <a:bodyPr/>
+          <a:lstStyle/>
+          <a:p>
+            <a:endParaRPr lang="es-ES"/>
+          </a:p>
+        </p:txBody>
       </p:sp>
       <p:sp>
         <p:nvSpPr>
@@ -9718,7 +9380,7 @@
           <a:bodyPr wrap="square" lIns="0" tIns="0" rIns="0" bIns="0" rtlCol="0" anchor="t"/>
           <a:lstStyle/>
           <a:p>
-            <a:pPr indent="0" marL="0">
+            <a:pPr marL="0" indent="0">
               <a:buNone/>
             </a:pPr>
             <a:r>
@@ -9757,7 +9419,7 @@
           <a:bodyPr wrap="square" lIns="0" tIns="0" rIns="0" bIns="0" rtlCol="0" anchor="t"/>
           <a:lstStyle/>
           <a:p>
-            <a:pPr indent="0" marL="0">
+            <a:pPr marL="0" indent="0">
               <a:lnSpc>
                 <a:spcPct val="112000"/>
               </a:lnSpc>
@@ -9799,13 +9461,20 @@
           </a:solidFill>
           <a:ln/>
           <a:effectLst>
-            <a:outerShdw sx="100000" sy="100000" kx="0" ky="0" algn="bl" rotWithShape="0" blurRad="114300" dist="38100" dir="5400000">
+            <a:outerShdw blurRad="114300" dist="38100" dir="5400000" algn="bl" rotWithShape="0">
               <a:srgbClr val="000000">
                 <a:alpha val="16000"/>
               </a:srgbClr>
             </a:outerShdw>
           </a:effectLst>
         </p:spPr>
+        <p:txBody>
+          <a:bodyPr/>
+          <a:lstStyle/>
+          <a:p>
+            <a:endParaRPr lang="es-ES"/>
+          </a:p>
+        </p:txBody>
       </p:sp>
       <p:sp>
         <p:nvSpPr>
@@ -9828,7 +9497,7 @@
           <a:bodyPr wrap="square" lIns="0" tIns="0" rIns="0" bIns="0" rtlCol="0" anchor="t"/>
           <a:lstStyle/>
           <a:p>
-            <a:pPr indent="0" marL="0">
+            <a:pPr marL="0" indent="0">
               <a:buNone/>
             </a:pPr>
             <a:r>
@@ -9867,7 +9536,7 @@
           <a:bodyPr wrap="square" lIns="0" tIns="0" rIns="0" bIns="0" rtlCol="0" anchor="t"/>
           <a:lstStyle/>
           <a:p>
-            <a:pPr indent="0" marL="0">
+            <a:pPr marL="0" indent="0">
               <a:lnSpc>
                 <a:spcPct val="112000"/>
               </a:lnSpc>
@@ -9909,13 +9578,20 @@
           </a:solidFill>
           <a:ln/>
           <a:effectLst>
-            <a:outerShdw sx="100000" sy="100000" kx="0" ky="0" algn="bl" rotWithShape="0" blurRad="114300" dist="38100" dir="5400000">
+            <a:outerShdw blurRad="114300" dist="38100" dir="5400000" algn="bl" rotWithShape="0">
               <a:srgbClr val="000000">
                 <a:alpha val="16000"/>
               </a:srgbClr>
             </a:outerShdw>
           </a:effectLst>
         </p:spPr>
+        <p:txBody>
+          <a:bodyPr/>
+          <a:lstStyle/>
+          <a:p>
+            <a:endParaRPr lang="es-ES"/>
+          </a:p>
+        </p:txBody>
       </p:sp>
       <p:sp>
         <p:nvSpPr>
@@ -9938,7 +9614,7 @@
           <a:bodyPr wrap="square" lIns="0" tIns="0" rIns="0" bIns="0" rtlCol="0" anchor="t"/>
           <a:lstStyle/>
           <a:p>
-            <a:pPr indent="0" marL="0">
+            <a:pPr marL="0" indent="0">
               <a:buNone/>
             </a:pPr>
             <a:r>
@@ -9977,7 +9653,7 @@
           <a:bodyPr wrap="square" lIns="0" tIns="0" rIns="0" bIns="0" rtlCol="0" anchor="t"/>
           <a:lstStyle/>
           <a:p>
-            <a:pPr indent="0" marL="0">
+            <a:pPr marL="0" indent="0">
               <a:lnSpc>
                 <a:spcPct val="112000"/>
               </a:lnSpc>
@@ -10019,13 +9695,20 @@
           </a:solidFill>
           <a:ln/>
           <a:effectLst>
-            <a:outerShdw sx="100000" sy="100000" kx="0" ky="0" algn="bl" rotWithShape="0" blurRad="114300" dist="38100" dir="5400000">
+            <a:outerShdw blurRad="114300" dist="38100" dir="5400000" algn="bl" rotWithShape="0">
               <a:srgbClr val="000000">
                 <a:alpha val="16000"/>
               </a:srgbClr>
             </a:outerShdw>
           </a:effectLst>
         </p:spPr>
+        <p:txBody>
+          <a:bodyPr/>
+          <a:lstStyle/>
+          <a:p>
+            <a:endParaRPr lang="es-ES"/>
+          </a:p>
+        </p:txBody>
       </p:sp>
       <p:sp>
         <p:nvSpPr>
@@ -10048,7 +9731,7 @@
           <a:bodyPr wrap="square" lIns="0" tIns="0" rIns="0" bIns="0" rtlCol="0" anchor="ctr"/>
           <a:lstStyle/>
           <a:p>
-            <a:pPr indent="0" marL="0">
+            <a:pPr marL="0" indent="0">
               <a:buNone/>
             </a:pPr>
             <a:r>
@@ -10062,9 +9745,6 @@
               </a:rPr>
               <a:t>What worked:  </a:t>
             </a:r>
-            <a:pPr indent="0" marL="0">
-              <a:buNone/>
-            </a:pPr>
             <a:r>
               <a:rPr lang="en-US" sz="1450" dirty="0">
                 <a:solidFill>
@@ -10076,9 +9756,6 @@
               </a:rPr>
               <a:t>keeping everything in one reproducible pipeline.   </a:t>
             </a:r>
-            <a:pPr indent="0" marL="0">
-              <a:buNone/>
-            </a:pPr>
             <a:r>
               <a:rPr lang="en-US" sz="1450" b="1" dirty="0">
                 <a:solidFill>
@@ -10090,9 +9767,6 @@
               </a:rPr>
               <a:t>To improve:  </a:t>
             </a:r>
-            <a:pPr indent="0" marL="0">
-              <a:buNone/>
-            </a:pPr>
             <a:r>
               <a:rPr lang="en-US" sz="1450" dirty="0">
                 <a:solidFill>
@@ -10129,7 +9803,7 @@
           <a:bodyPr wrap="square" rtlCol="0" anchor="ctr"/>
           <a:lstStyle/>
           <a:p>
-            <a:pPr algn="l" indent="0" marL="0">
+            <a:pPr marL="0" indent="0" algn="l">
               <a:buNone/>
             </a:pPr>
             <a:r>
@@ -10168,7 +9842,7 @@
           <a:bodyPr wrap="square" rtlCol="0" anchor="ctr"/>
           <a:lstStyle/>
           <a:p>
-            <a:pPr algn="r" indent="0" marL="0">
+            <a:pPr marL="0" indent="0" algn="r">
               <a:buNone/>
             </a:pPr>
             <a:r>
@@ -10202,6 +9876,7 @@
         <a:solidFill>
           <a:srgbClr val="13132B"/>
         </a:solidFill>
+        <a:effectLst/>
       </p:bgPr>
     </p:bg>
     <p:spTree>
@@ -10218,30 +9893,6 @@
           <a:chExt cx="0" cy="0"/>
         </a:xfrm>
       </p:grpSpPr>
-      <p:pic>
-        <p:nvPicPr>
-          <p:cNvPr id="2" name="Image 0" descr="assets/logo_teal.png">    </p:cNvPr>
-          <p:cNvPicPr>
-            <a:picLocks noChangeAspect="1"/>
-          </p:cNvPicPr>
-          <p:nvPr/>
-        </p:nvPicPr>
-        <p:blipFill>
-          <a:blip r:embed="rId1"/>
-          <a:stretch>
-            <a:fillRect/>
-          </a:stretch>
-        </p:blipFill>
-        <p:spPr>
-          <a:xfrm>
-            <a:off x="502920" y="310896"/>
-            <a:ext cx="1417320" cy="374904"/>
-          </a:xfrm>
-          <a:prstGeom prst="rect">
-            <a:avLst/>
-          </a:prstGeom>
-        </p:spPr>
-      </p:pic>
       <p:sp>
         <p:nvSpPr>
           <p:cNvPr id="3" name="Text 0"/>
@@ -10263,11 +9914,11 @@
           <a:bodyPr wrap="square" lIns="0" tIns="0" rIns="0" bIns="0" rtlCol="0" anchor="ctr"/>
           <a:lstStyle/>
           <a:p>
-            <a:pPr indent="0" marL="0">
-              <a:buNone/>
-            </a:pPr>
-            <a:r>
-              <a:rPr lang="en-US" sz="1200" b="1" spc="200" kern="0" dirty="0">
+            <a:pPr marL="0" indent="0">
+              <a:buNone/>
+            </a:pPr>
+            <a:r>
+              <a:rPr lang="en-US" sz="1200" b="1" kern="0" spc="200" dirty="0">
                 <a:solidFill>
                   <a:srgbClr val="2EE6D6"/>
                 </a:solidFill>
@@ -10302,7 +9953,7 @@
           <a:bodyPr wrap="square" lIns="0" tIns="0" rIns="0" bIns="0" rtlCol="0" anchor="ctr"/>
           <a:lstStyle/>
           <a:p>
-            <a:pPr indent="0" marL="0">
+            <a:pPr marL="0" indent="0">
               <a:buNone/>
             </a:pPr>
             <a:r>
@@ -10341,13 +9992,20 @@
           </a:solidFill>
           <a:ln/>
           <a:effectLst>
-            <a:outerShdw sx="100000" sy="100000" kx="0" ky="0" algn="bl" rotWithShape="0" blurRad="114300" dist="38100" dir="5400000">
+            <a:outerShdw blurRad="114300" dist="38100" dir="5400000" algn="bl" rotWithShape="0">
               <a:srgbClr val="000000">
                 <a:alpha val="16000"/>
               </a:srgbClr>
             </a:outerShdw>
           </a:effectLst>
         </p:spPr>
+        <p:txBody>
+          <a:bodyPr/>
+          <a:lstStyle/>
+          <a:p>
+            <a:endParaRPr lang="es-ES"/>
+          </a:p>
+        </p:txBody>
       </p:sp>
       <p:sp>
         <p:nvSpPr>
@@ -10370,7 +10028,7 @@
           <a:bodyPr wrap="square" lIns="0" tIns="0" rIns="0" bIns="0" rtlCol="0" anchor="ctr"/>
           <a:lstStyle/>
           <a:p>
-            <a:pPr algn="ctr" indent="0" marL="0">
+            <a:pPr marL="0" indent="0" algn="ctr">
               <a:buNone/>
             </a:pPr>
             <a:r>
@@ -10409,7 +10067,7 @@
           <a:bodyPr wrap="square" lIns="0" tIns="0" rIns="0" bIns="0" rtlCol="0" anchor="ctr"/>
           <a:lstStyle/>
           <a:p>
-            <a:pPr algn="ctr" indent="0" marL="0">
+            <a:pPr marL="0" indent="0" algn="ctr">
               <a:buNone/>
             </a:pPr>
             <a:r>
@@ -10448,13 +10106,20 @@
           </a:solidFill>
           <a:ln/>
           <a:effectLst>
-            <a:outerShdw sx="100000" sy="100000" kx="0" ky="0" algn="bl" rotWithShape="0" blurRad="114300" dist="38100" dir="5400000">
+            <a:outerShdw blurRad="114300" dist="38100" dir="5400000" algn="bl" rotWithShape="0">
               <a:srgbClr val="000000">
                 <a:alpha val="16000"/>
               </a:srgbClr>
             </a:outerShdw>
           </a:effectLst>
         </p:spPr>
+        <p:txBody>
+          <a:bodyPr/>
+          <a:lstStyle/>
+          <a:p>
+            <a:endParaRPr lang="es-ES"/>
+          </a:p>
+        </p:txBody>
       </p:sp>
       <p:sp>
         <p:nvSpPr>
@@ -10477,7 +10142,7 @@
           <a:bodyPr wrap="square" lIns="0" tIns="0" rIns="0" bIns="0" rtlCol="0" anchor="ctr"/>
           <a:lstStyle/>
           <a:p>
-            <a:pPr algn="ctr" indent="0" marL="0">
+            <a:pPr marL="0" indent="0" algn="ctr">
               <a:buNone/>
             </a:pPr>
             <a:r>
@@ -10516,7 +10181,7 @@
           <a:bodyPr wrap="square" lIns="0" tIns="0" rIns="0" bIns="0" rtlCol="0" anchor="ctr"/>
           <a:lstStyle/>
           <a:p>
-            <a:pPr algn="ctr" indent="0" marL="0">
+            <a:pPr marL="0" indent="0" algn="ctr">
               <a:buNone/>
             </a:pPr>
             <a:r>
@@ -10555,25 +10220,32 @@
           </a:solidFill>
           <a:ln/>
           <a:effectLst>
-            <a:outerShdw sx="100000" sy="100000" kx="0" ky="0" algn="bl" rotWithShape="0" blurRad="114300" dist="38100" dir="5400000">
+            <a:outerShdw blurRad="114300" dist="38100" dir="5400000" algn="bl" rotWithShape="0">
               <a:srgbClr val="000000">
                 <a:alpha val="16000"/>
               </a:srgbClr>
             </a:outerShdw>
           </a:effectLst>
         </p:spPr>
+        <p:txBody>
+          <a:bodyPr/>
+          <a:lstStyle/>
+          <a:p>
+            <a:endParaRPr lang="es-ES"/>
+          </a:p>
+        </p:txBody>
       </p:sp>
       <p:pic>
         <p:nvPicPr>
-          <p:cNvPr id="12" name="Image 1" descr="assets/fig_err_pricerange.png">    </p:cNvPr>
+          <p:cNvPr id="12" name="Image 1" descr="assets/fig_err_pricerange.png"/>
           <p:cNvPicPr>
             <a:picLocks noChangeAspect="1"/>
           </p:cNvPicPr>
           <p:nvPr/>
         </p:nvPicPr>
         <p:blipFill>
-          <a:blip r:embed="rId2"/>
-          <a:srcRect l="0" r="0" t="0" b="0"/>
+          <a:blip r:embed="rId3"/>
+          <a:srcRect/>
           <a:stretch/>
         </p:blipFill>
         <p:spPr>
@@ -10607,7 +10279,7 @@
           <a:bodyPr wrap="square" lIns="0" tIns="0" rIns="0" bIns="0" rtlCol="0" anchor="ctr"/>
           <a:lstStyle/>
           <a:p>
-            <a:pPr indent="0" marL="0">
+            <a:pPr marL="0" indent="0">
               <a:buNone/>
             </a:pPr>
             <a:r>
@@ -10646,7 +10318,7 @@
           <a:bodyPr wrap="square" lIns="0" tIns="0" rIns="0" bIns="0" rtlCol="0" anchor="t"/>
           <a:lstStyle/>
           <a:p>
-            <a:pPr indent="0" marL="0">
+            <a:pPr marL="0" indent="0">
               <a:lnSpc>
                 <a:spcPct val="115000"/>
               </a:lnSpc>
@@ -10666,7 +10338,7 @@
             <a:endParaRPr lang="en-US" sz="1400" dirty="0"/>
           </a:p>
           <a:p>
-            <a:pPr indent="0" marL="0">
+            <a:pPr marL="0" indent="0">
               <a:lnSpc>
                 <a:spcPct val="115000"/>
               </a:lnSpc>
@@ -10686,7 +10358,7 @@
             <a:endParaRPr lang="en-US" sz="1400" dirty="0"/>
           </a:p>
           <a:p>
-            <a:pPr indent="0" marL="0">
+            <a:pPr marL="0" indent="0">
               <a:lnSpc>
                 <a:spcPct val="115000"/>
               </a:lnSpc>
@@ -10703,12 +10375,6 @@
               </a:rPr>
               <a:t>In hindsight: </a:t>
             </a:r>
-            <a:pPr indent="0" marL="0">
-              <a:lnSpc>
-                <a:spcPct val="115000"/>
-              </a:lnSpc>
-              <a:buNone/>
-            </a:pPr>
             <a:r>
               <a:rPr lang="en-US" sz="1400" dirty="0">
                 <a:solidFill>
@@ -10745,7 +10411,7 @@
           <a:bodyPr wrap="square" lIns="0" tIns="0" rIns="0" bIns="0" rtlCol="0" anchor="ctr"/>
           <a:lstStyle/>
           <a:p>
-            <a:pPr algn="ctr" indent="0" marL="0">
+            <a:pPr marL="0" indent="0" algn="ctr">
               <a:buNone/>
             </a:pPr>
             <a:r>
@@ -11064,4 +10730,319 @@
     </a:ext>
   </a:extLst>
 </a:theme>
+</file>
+
+<file path=ppt/theme/theme2.xml><?xml version="1.0" encoding="utf-8"?>
+<a:theme xmlns:a="http://schemas.openxmlformats.org/drawingml/2006/main" name="Tema de Office">
+  <a:themeElements>
+    <a:clrScheme name="Office">
+      <a:dk1>
+        <a:sysClr val="windowText" lastClr="000000"/>
+      </a:dk1>
+      <a:lt1>
+        <a:sysClr val="window" lastClr="FFFFFF"/>
+      </a:lt1>
+      <a:dk2>
+        <a:srgbClr val="0E2841"/>
+      </a:dk2>
+      <a:lt2>
+        <a:srgbClr val="E8E8E8"/>
+      </a:lt2>
+      <a:accent1>
+        <a:srgbClr val="156082"/>
+      </a:accent1>
+      <a:accent2>
+        <a:srgbClr val="E97132"/>
+      </a:accent2>
+      <a:accent3>
+        <a:srgbClr val="196B24"/>
+      </a:accent3>
+      <a:accent4>
+        <a:srgbClr val="0F9ED5"/>
+      </a:accent4>
+      <a:accent5>
+        <a:srgbClr val="A02B93"/>
+      </a:accent5>
+      <a:accent6>
+        <a:srgbClr val="4EA72E"/>
+      </a:accent6>
+      <a:hlink>
+        <a:srgbClr val="467886"/>
+      </a:hlink>
+      <a:folHlink>
+        <a:srgbClr val="96607D"/>
+      </a:folHlink>
+    </a:clrScheme>
+    <a:fontScheme name="Office">
+      <a:majorFont>
+        <a:latin typeface="Aptos Display" panose="02110004020202020204"/>
+        <a:ea typeface=""/>
+        <a:cs typeface=""/>
+        <a:font script="Jpan" typeface="游ゴシック Light"/>
+        <a:font script="Hang" typeface="맑은 고딕"/>
+        <a:font script="Hans" typeface="等线 Light"/>
+        <a:font script="Hant" typeface="新細明體"/>
+        <a:font script="Arab" typeface="Times New Roman"/>
+        <a:font script="Hebr" typeface="Times New Roman"/>
+        <a:font script="Thai" typeface="Angsana New"/>
+        <a:font script="Ethi" typeface="Nyala"/>
+        <a:font script="Beng" typeface="Vrinda"/>
+        <a:font script="Gujr" typeface="Shruti"/>
+        <a:font script="Khmr" typeface="MoolBoran"/>
+        <a:font script="Knda" typeface="Tunga"/>
+        <a:font script="Guru" typeface="Raavi"/>
+        <a:font script="Cans" typeface="Euphemia"/>
+        <a:font script="Cher" typeface="Plantagenet Cherokee"/>
+        <a:font script="Yiii" typeface="Microsoft Yi Baiti"/>
+        <a:font script="Tibt" typeface="Microsoft Himalaya"/>
+        <a:font script="Thaa" typeface="MV Boli"/>
+        <a:font script="Deva" typeface="Mangal"/>
+        <a:font script="Telu" typeface="Gautami"/>
+        <a:font script="Taml" typeface="Latha"/>
+        <a:font script="Syrc" typeface="Estrangelo Edessa"/>
+        <a:font script="Orya" typeface="Kalinga"/>
+        <a:font script="Mlym" typeface="Kartika"/>
+        <a:font script="Laoo" typeface="DokChampa"/>
+        <a:font script="Sinh" typeface="Iskoola Pota"/>
+        <a:font script="Mong" typeface="Mongolian Baiti"/>
+        <a:font script="Viet" typeface="Times New Roman"/>
+        <a:font script="Uigh" typeface="Microsoft Uighur"/>
+        <a:font script="Geor" typeface="Sylfaen"/>
+        <a:font script="Armn" typeface="Arial"/>
+        <a:font script="Bugi" typeface="Leelawadee UI"/>
+        <a:font script="Bopo" typeface="Microsoft JhengHei"/>
+        <a:font script="Java" typeface="Javanese Text"/>
+        <a:font script="Lisu" typeface="Segoe UI"/>
+        <a:font script="Mymr" typeface="Myanmar Text"/>
+        <a:font script="Nkoo" typeface="Ebrima"/>
+        <a:font script="Olck" typeface="Nirmala UI"/>
+        <a:font script="Osma" typeface="Ebrima"/>
+        <a:font script="Phag" typeface="Phagspa"/>
+        <a:font script="Syrn" typeface="Estrangelo Edessa"/>
+        <a:font script="Syrj" typeface="Estrangelo Edessa"/>
+        <a:font script="Syre" typeface="Estrangelo Edessa"/>
+        <a:font script="Sora" typeface="Nirmala UI"/>
+        <a:font script="Tale" typeface="Microsoft Tai Le"/>
+        <a:font script="Talu" typeface="Microsoft New Tai Lue"/>
+        <a:font script="Tfng" typeface="Ebrima"/>
+      </a:majorFont>
+      <a:minorFont>
+        <a:latin typeface="Aptos" panose="02110004020202020204"/>
+        <a:ea typeface=""/>
+        <a:cs typeface=""/>
+        <a:font script="Jpan" typeface="游ゴシック"/>
+        <a:font script="Hang" typeface="맑은 고딕"/>
+        <a:font script="Hans" typeface="等线"/>
+        <a:font script="Hant" typeface="新細明體"/>
+        <a:font script="Arab" typeface="Arial"/>
+        <a:font script="Hebr" typeface="Arial"/>
+        <a:font script="Thai" typeface="Cordia New"/>
+        <a:font script="Ethi" typeface="Nyala"/>
+        <a:font script="Beng" typeface="Vrinda"/>
+        <a:font script="Gujr" typeface="Shruti"/>
+        <a:font script="Khmr" typeface="DaunPenh"/>
+        <a:font script="Knda" typeface="Tunga"/>
+        <a:font script="Guru" typeface="Raavi"/>
+        <a:font script="Cans" typeface="Euphemia"/>
+        <a:font script="Cher" typeface="Plantagenet Cherokee"/>
+        <a:font script="Yiii" typeface="Microsoft Yi Baiti"/>
+        <a:font script="Tibt" typeface="Microsoft Himalaya"/>
+        <a:font script="Thaa" typeface="MV Boli"/>
+        <a:font script="Deva" typeface="Mangal"/>
+        <a:font script="Telu" typeface="Gautami"/>
+        <a:font script="Taml" typeface="Latha"/>
+        <a:font script="Syrc" typeface="Estrangelo Edessa"/>
+        <a:font script="Orya" typeface="Kalinga"/>
+        <a:font script="Mlym" typeface="Kartika"/>
+        <a:font script="Laoo" typeface="DokChampa"/>
+        <a:font script="Sinh" typeface="Iskoola Pota"/>
+        <a:font script="Mong" typeface="Mongolian Baiti"/>
+        <a:font script="Viet" typeface="Arial"/>
+        <a:font script="Uigh" typeface="Microsoft Uighur"/>
+        <a:font script="Geor" typeface="Sylfaen"/>
+        <a:font script="Armn" typeface="Arial"/>
+        <a:font script="Bugi" typeface="Leelawadee UI"/>
+        <a:font script="Bopo" typeface="Microsoft JhengHei"/>
+        <a:font script="Java" typeface="Javanese Text"/>
+        <a:font script="Lisu" typeface="Segoe UI"/>
+        <a:font script="Mymr" typeface="Myanmar Text"/>
+        <a:font script="Nkoo" typeface="Ebrima"/>
+        <a:font script="Olck" typeface="Nirmala UI"/>
+        <a:font script="Osma" typeface="Ebrima"/>
+        <a:font script="Phag" typeface="Phagspa"/>
+        <a:font script="Syrn" typeface="Estrangelo Edessa"/>
+        <a:font script="Syrj" typeface="Estrangelo Edessa"/>
+        <a:font script="Syre" typeface="Estrangelo Edessa"/>
+        <a:font script="Sora" typeface="Nirmala UI"/>
+        <a:font script="Tale" typeface="Microsoft Tai Le"/>
+        <a:font script="Talu" typeface="Microsoft New Tai Lue"/>
+        <a:font script="Tfng" typeface="Ebrima"/>
+      </a:minorFont>
+    </a:fontScheme>
+    <a:fmtScheme name="Office">
+      <a:fillStyleLst>
+        <a:solidFill>
+          <a:schemeClr val="phClr"/>
+        </a:solidFill>
+        <a:gradFill rotWithShape="1">
+          <a:gsLst>
+            <a:gs pos="0">
+              <a:schemeClr val="phClr">
+                <a:lumMod val="110000"/>
+                <a:satMod val="105000"/>
+                <a:tint val="67000"/>
+              </a:schemeClr>
+            </a:gs>
+            <a:gs pos="50000">
+              <a:schemeClr val="phClr">
+                <a:lumMod val="105000"/>
+                <a:satMod val="103000"/>
+                <a:tint val="73000"/>
+              </a:schemeClr>
+            </a:gs>
+            <a:gs pos="100000">
+              <a:schemeClr val="phClr">
+                <a:lumMod val="105000"/>
+                <a:satMod val="109000"/>
+                <a:tint val="81000"/>
+              </a:schemeClr>
+            </a:gs>
+          </a:gsLst>
+          <a:lin ang="5400000" scaled="0"/>
+        </a:gradFill>
+        <a:gradFill rotWithShape="1">
+          <a:gsLst>
+            <a:gs pos="0">
+              <a:schemeClr val="phClr">
+                <a:satMod val="103000"/>
+                <a:lumMod val="102000"/>
+                <a:tint val="94000"/>
+              </a:schemeClr>
+            </a:gs>
+            <a:gs pos="50000">
+              <a:schemeClr val="phClr">
+                <a:satMod val="110000"/>
+                <a:lumMod val="100000"/>
+                <a:shade val="100000"/>
+              </a:schemeClr>
+            </a:gs>
+            <a:gs pos="100000">
+              <a:schemeClr val="phClr">
+                <a:lumMod val="99000"/>
+                <a:satMod val="120000"/>
+                <a:shade val="78000"/>
+              </a:schemeClr>
+            </a:gs>
+          </a:gsLst>
+          <a:lin ang="5400000" scaled="0"/>
+        </a:gradFill>
+      </a:fillStyleLst>
+      <a:lnStyleLst>
+        <a:ln w="12700" cap="flat" cmpd="sng" algn="ctr">
+          <a:solidFill>
+            <a:schemeClr val="phClr"/>
+          </a:solidFill>
+          <a:prstDash val="solid"/>
+          <a:miter lim="800000"/>
+        </a:ln>
+        <a:ln w="19050" cap="flat" cmpd="sng" algn="ctr">
+          <a:solidFill>
+            <a:schemeClr val="phClr"/>
+          </a:solidFill>
+          <a:prstDash val="solid"/>
+          <a:miter lim="800000"/>
+        </a:ln>
+        <a:ln w="25400" cap="flat" cmpd="sng" algn="ctr">
+          <a:solidFill>
+            <a:schemeClr val="phClr"/>
+          </a:solidFill>
+          <a:prstDash val="solid"/>
+          <a:miter lim="800000"/>
+        </a:ln>
+      </a:lnStyleLst>
+      <a:effectStyleLst>
+        <a:effectStyle>
+          <a:effectLst/>
+        </a:effectStyle>
+        <a:effectStyle>
+          <a:effectLst/>
+        </a:effectStyle>
+        <a:effectStyle>
+          <a:effectLst>
+            <a:outerShdw blurRad="57150" dist="19050" dir="5400000" algn="ctr" rotWithShape="0">
+              <a:srgbClr val="000000">
+                <a:alpha val="63000"/>
+              </a:srgbClr>
+            </a:outerShdw>
+          </a:effectLst>
+        </a:effectStyle>
+      </a:effectStyleLst>
+      <a:bgFillStyleLst>
+        <a:solidFill>
+          <a:schemeClr val="phClr"/>
+        </a:solidFill>
+        <a:solidFill>
+          <a:schemeClr val="phClr">
+            <a:tint val="95000"/>
+            <a:satMod val="170000"/>
+          </a:schemeClr>
+        </a:solidFill>
+        <a:gradFill rotWithShape="1">
+          <a:gsLst>
+            <a:gs pos="0">
+              <a:schemeClr val="phClr">
+                <a:tint val="93000"/>
+                <a:satMod val="150000"/>
+                <a:shade val="98000"/>
+                <a:lumMod val="102000"/>
+              </a:schemeClr>
+            </a:gs>
+            <a:gs pos="50000">
+              <a:schemeClr val="phClr">
+                <a:tint val="98000"/>
+                <a:satMod val="130000"/>
+                <a:shade val="90000"/>
+                <a:lumMod val="103000"/>
+              </a:schemeClr>
+            </a:gs>
+            <a:gs pos="100000">
+              <a:schemeClr val="phClr">
+                <a:shade val="63000"/>
+                <a:satMod val="120000"/>
+              </a:schemeClr>
+            </a:gs>
+          </a:gsLst>
+          <a:lin ang="5400000" scaled="0"/>
+        </a:gradFill>
+      </a:bgFillStyleLst>
+    </a:fmtScheme>
+  </a:themeElements>
+  <a:objectDefaults>
+    <a:lnDef>
+      <a:spPr/>
+      <a:bodyPr/>
+      <a:lstStyle/>
+      <a:style>
+        <a:lnRef idx="2">
+          <a:schemeClr val="accent1"/>
+        </a:lnRef>
+        <a:fillRef idx="0">
+          <a:schemeClr val="accent1"/>
+        </a:fillRef>
+        <a:effectRef idx="1">
+          <a:schemeClr val="accent1"/>
+        </a:effectRef>
+        <a:fontRef idx="minor">
+          <a:schemeClr val="tx1"/>
+        </a:fontRef>
+      </a:style>
+    </a:lnDef>
+  </a:objectDefaults>
+  <a:extraClrSchemeLst/>
+  <a:extLst>
+    <a:ext uri="{05A4C25C-085E-4340-85A3-A5531E510DB2}">
+      <thm15:themeFamily xmlns:thm15="http://schemas.microsoft.com/office/thememl/2012/main" name="Office Theme" id="{2E142A2C-CD16-42D6-873A-C26D2A0506FA}" vid="{1BDDFF52-6CD6-40A5-AB3C-68EB2F1E4D0A}"/>
+    </a:ext>
+  </a:extLst>
+</a:theme>
 </file>